--- a/tests/testthat/multi_slide_fullslide_43.pptx
+++ b/tests/testthat/multi_slide_fullslide_43.pptx
@@ -2659,8 +2659,8 @@
           </p:nvSpPr>
           <p:spPr>
             <a:xfrm>
-              <a:off x="1061087" y="1441338"/>
-              <a:ext cx="7499913" cy="4536564"/>
+              <a:off x="1065110" y="1441338"/>
+              <a:ext cx="7495890" cy="4538850"/>
             </a:xfrm>
             <a:prstGeom prst="rect">
               <a:avLst/>
@@ -2685,21 +2685,21 @@
           </p:nvSpPr>
           <p:spPr>
             <a:xfrm>
-              <a:off x="1061087" y="5403154"/>
-              <a:ext cx="7499913" cy="0"/>
+              <a:off x="1065110" y="5405150"/>
+              <a:ext cx="7495890" cy="0"/>
             </a:xfrm>
             <a:custGeom>
               <a:avLst/>
               <a:pathLst>
-                <a:path w="7499913" h="0">
+                <a:path w="7495890" h="0">
                   <a:moveTo>
                     <a:pt x="0" y="0"/>
                   </a:moveTo>
                   <a:lnTo>
-                    <a:pt x="7499913" y="0"/>
+                    <a:pt x="7495890" y="0"/>
                   </a:lnTo>
                   <a:lnTo>
-                    <a:pt x="7499913" y="0"/>
+                    <a:pt x="7495890" y="0"/>
                   </a:lnTo>
                 </a:path>
               </a:pathLst>
@@ -2728,21 +2728,21 @@
           </p:nvSpPr>
           <p:spPr>
             <a:xfrm>
-              <a:off x="1061087" y="4525675"/>
-              <a:ext cx="7499913" cy="0"/>
+              <a:off x="1065110" y="4527229"/>
+              <a:ext cx="7495890" cy="0"/>
             </a:xfrm>
             <a:custGeom>
               <a:avLst/>
               <a:pathLst>
-                <a:path w="7499913" h="0">
+                <a:path w="7495890" h="0">
                   <a:moveTo>
                     <a:pt x="0" y="0"/>
                   </a:moveTo>
                   <a:lnTo>
-                    <a:pt x="7499913" y="0"/>
+                    <a:pt x="7495890" y="0"/>
                   </a:lnTo>
                   <a:lnTo>
-                    <a:pt x="7499913" y="0"/>
+                    <a:pt x="7495890" y="0"/>
                   </a:lnTo>
                 </a:path>
               </a:pathLst>
@@ -2771,21 +2771,21 @@
           </p:nvSpPr>
           <p:spPr>
             <a:xfrm>
-              <a:off x="1061087" y="3648196"/>
-              <a:ext cx="7499913" cy="0"/>
+              <a:off x="1065110" y="3649308"/>
+              <a:ext cx="7495890" cy="0"/>
             </a:xfrm>
             <a:custGeom>
               <a:avLst/>
               <a:pathLst>
-                <a:path w="7499913" h="0">
+                <a:path w="7495890" h="0">
                   <a:moveTo>
                     <a:pt x="0" y="0"/>
                   </a:moveTo>
                   <a:lnTo>
-                    <a:pt x="7499913" y="0"/>
+                    <a:pt x="7495890" y="0"/>
                   </a:lnTo>
                   <a:lnTo>
-                    <a:pt x="7499913" y="0"/>
+                    <a:pt x="7495890" y="0"/>
                   </a:lnTo>
                 </a:path>
               </a:pathLst>
@@ -2814,21 +2814,21 @@
           </p:nvSpPr>
           <p:spPr>
             <a:xfrm>
-              <a:off x="1061087" y="2770718"/>
-              <a:ext cx="7499913" cy="0"/>
+              <a:off x="1065110" y="2771388"/>
+              <a:ext cx="7495890" cy="0"/>
             </a:xfrm>
             <a:custGeom>
               <a:avLst/>
               <a:pathLst>
-                <a:path w="7499913" h="0">
+                <a:path w="7495890" h="0">
                   <a:moveTo>
                     <a:pt x="0" y="0"/>
                   </a:moveTo>
                   <a:lnTo>
-                    <a:pt x="7499913" y="0"/>
+                    <a:pt x="7495890" y="0"/>
                   </a:lnTo>
                   <a:lnTo>
-                    <a:pt x="7499913" y="0"/>
+                    <a:pt x="7495890" y="0"/>
                   </a:lnTo>
                 </a:path>
               </a:pathLst>
@@ -2857,21 +2857,21 @@
           </p:nvSpPr>
           <p:spPr>
             <a:xfrm>
-              <a:off x="1061087" y="1893239"/>
-              <a:ext cx="7499913" cy="0"/>
+              <a:off x="1065110" y="1893467"/>
+              <a:ext cx="7495890" cy="0"/>
             </a:xfrm>
             <a:custGeom>
               <a:avLst/>
               <a:pathLst>
-                <a:path w="7499913" h="0">
+                <a:path w="7495890" h="0">
                   <a:moveTo>
                     <a:pt x="0" y="0"/>
                   </a:moveTo>
                   <a:lnTo>
-                    <a:pt x="7499913" y="0"/>
+                    <a:pt x="7495890" y="0"/>
                   </a:lnTo>
                   <a:lnTo>
-                    <a:pt x="7499913" y="0"/>
+                    <a:pt x="7495890" y="0"/>
                   </a:lnTo>
                 </a:path>
               </a:pathLst>
@@ -2900,15 +2900,15 @@
           </p:nvSpPr>
           <p:spPr>
             <a:xfrm>
-              <a:off x="1379329" y="1441338"/>
-              <a:ext cx="0" cy="4536564"/>
+              <a:off x="1383181" y="1441338"/>
+              <a:ext cx="0" cy="4538850"/>
             </a:xfrm>
             <a:custGeom>
               <a:avLst/>
               <a:pathLst>
-                <a:path w="0" h="4536564">
+                <a:path w="0" h="4538850">
                   <a:moveTo>
-                    <a:pt x="0" y="4536564"/>
+                    <a:pt x="0" y="4538850"/>
                   </a:moveTo>
                   <a:lnTo>
                     <a:pt x="0" y="0"/>
@@ -2943,15 +2943,15 @@
           </p:nvSpPr>
           <p:spPr>
             <a:xfrm>
-              <a:off x="3122643" y="1441338"/>
-              <a:ext cx="0" cy="4536564"/>
+              <a:off x="3125561" y="1441338"/>
+              <a:ext cx="0" cy="4538850"/>
             </a:xfrm>
             <a:custGeom>
               <a:avLst/>
               <a:pathLst>
-                <a:path w="0" h="4536564">
+                <a:path w="0" h="4538850">
                   <a:moveTo>
-                    <a:pt x="0" y="4536564"/>
+                    <a:pt x="0" y="4538850"/>
                   </a:moveTo>
                   <a:lnTo>
                     <a:pt x="0" y="0"/>
@@ -2986,15 +2986,15 @@
           </p:nvSpPr>
           <p:spPr>
             <a:xfrm>
-              <a:off x="4865958" y="1441338"/>
-              <a:ext cx="0" cy="4536564"/>
+              <a:off x="4867940" y="1441338"/>
+              <a:ext cx="0" cy="4538850"/>
             </a:xfrm>
             <a:custGeom>
               <a:avLst/>
               <a:pathLst>
-                <a:path w="0" h="4536564">
+                <a:path w="0" h="4538850">
                   <a:moveTo>
-                    <a:pt x="0" y="4536564"/>
+                    <a:pt x="0" y="4538850"/>
                   </a:moveTo>
                   <a:lnTo>
                     <a:pt x="0" y="0"/>
@@ -3029,15 +3029,15 @@
           </p:nvSpPr>
           <p:spPr>
             <a:xfrm>
-              <a:off x="6609273" y="1441338"/>
-              <a:ext cx="0" cy="4536564"/>
+              <a:off x="6610320" y="1441338"/>
+              <a:ext cx="0" cy="4538850"/>
             </a:xfrm>
             <a:custGeom>
               <a:avLst/>
               <a:pathLst>
-                <a:path w="0" h="4536564">
+                <a:path w="0" h="4538850">
                   <a:moveTo>
-                    <a:pt x="0" y="4536564"/>
+                    <a:pt x="0" y="4538850"/>
                   </a:moveTo>
                   <a:lnTo>
                     <a:pt x="0" y="0"/>
@@ -3072,15 +3072,15 @@
           </p:nvSpPr>
           <p:spPr>
             <a:xfrm>
-              <a:off x="8352587" y="1441338"/>
-              <a:ext cx="0" cy="4536564"/>
+              <a:off x="8352699" y="1441338"/>
+              <a:ext cx="0" cy="4538850"/>
             </a:xfrm>
             <a:custGeom>
               <a:avLst/>
               <a:pathLst>
-                <a:path w="0" h="4536564">
+                <a:path w="0" h="4538850">
                   <a:moveTo>
-                    <a:pt x="0" y="4536564"/>
+                    <a:pt x="0" y="4538850"/>
                   </a:moveTo>
                   <a:lnTo>
                     <a:pt x="0" y="0"/>
@@ -3115,21 +3115,21 @@
           </p:nvSpPr>
           <p:spPr>
             <a:xfrm>
-              <a:off x="1061087" y="5841893"/>
-              <a:ext cx="7499913" cy="0"/>
+              <a:off x="1065110" y="5844110"/>
+              <a:ext cx="7495890" cy="0"/>
             </a:xfrm>
             <a:custGeom>
               <a:avLst/>
               <a:pathLst>
-                <a:path w="7499913" h="0">
+                <a:path w="7495890" h="0">
                   <a:moveTo>
                     <a:pt x="0" y="0"/>
                   </a:moveTo>
                   <a:lnTo>
-                    <a:pt x="7499913" y="0"/>
+                    <a:pt x="7495890" y="0"/>
                   </a:lnTo>
                   <a:lnTo>
-                    <a:pt x="7499913" y="0"/>
+                    <a:pt x="7495890" y="0"/>
                   </a:lnTo>
                 </a:path>
               </a:pathLst>
@@ -3158,21 +3158,21 @@
           </p:nvSpPr>
           <p:spPr>
             <a:xfrm>
-              <a:off x="1061087" y="4964414"/>
-              <a:ext cx="7499913" cy="0"/>
+              <a:off x="1065110" y="4966190"/>
+              <a:ext cx="7495890" cy="0"/>
             </a:xfrm>
             <a:custGeom>
               <a:avLst/>
               <a:pathLst>
-                <a:path w="7499913" h="0">
+                <a:path w="7495890" h="0">
                   <a:moveTo>
                     <a:pt x="0" y="0"/>
                   </a:moveTo>
                   <a:lnTo>
-                    <a:pt x="7499913" y="0"/>
+                    <a:pt x="7495890" y="0"/>
                   </a:lnTo>
                   <a:lnTo>
-                    <a:pt x="7499913" y="0"/>
+                    <a:pt x="7495890" y="0"/>
                   </a:lnTo>
                 </a:path>
               </a:pathLst>
@@ -3201,21 +3201,21 @@
           </p:nvSpPr>
           <p:spPr>
             <a:xfrm>
-              <a:off x="1061087" y="4086936"/>
-              <a:ext cx="7499913" cy="0"/>
+              <a:off x="1065110" y="4088269"/>
+              <a:ext cx="7495890" cy="0"/>
             </a:xfrm>
             <a:custGeom>
               <a:avLst/>
               <a:pathLst>
-                <a:path w="7499913" h="0">
+                <a:path w="7495890" h="0">
                   <a:moveTo>
                     <a:pt x="0" y="0"/>
                   </a:moveTo>
                   <a:lnTo>
-                    <a:pt x="7499913" y="0"/>
+                    <a:pt x="7495890" y="0"/>
                   </a:lnTo>
                   <a:lnTo>
-                    <a:pt x="7499913" y="0"/>
+                    <a:pt x="7495890" y="0"/>
                   </a:lnTo>
                 </a:path>
               </a:pathLst>
@@ -3244,21 +3244,21 @@
           </p:nvSpPr>
           <p:spPr>
             <a:xfrm>
-              <a:off x="1061087" y="3209457"/>
-              <a:ext cx="7499913" cy="0"/>
+              <a:off x="1065110" y="3210348"/>
+              <a:ext cx="7495890" cy="0"/>
             </a:xfrm>
             <a:custGeom>
               <a:avLst/>
               <a:pathLst>
-                <a:path w="7499913" h="0">
+                <a:path w="7495890" h="0">
                   <a:moveTo>
                     <a:pt x="0" y="0"/>
                   </a:moveTo>
                   <a:lnTo>
-                    <a:pt x="7499913" y="0"/>
+                    <a:pt x="7495890" y="0"/>
                   </a:lnTo>
                   <a:lnTo>
-                    <a:pt x="7499913" y="0"/>
+                    <a:pt x="7495890" y="0"/>
                   </a:lnTo>
                 </a:path>
               </a:pathLst>
@@ -3287,21 +3287,21 @@
           </p:nvSpPr>
           <p:spPr>
             <a:xfrm>
-              <a:off x="1061087" y="2331978"/>
-              <a:ext cx="7499913" cy="0"/>
+              <a:off x="1065110" y="2332427"/>
+              <a:ext cx="7495890" cy="0"/>
             </a:xfrm>
             <a:custGeom>
               <a:avLst/>
               <a:pathLst>
-                <a:path w="7499913" h="0">
+                <a:path w="7495890" h="0">
                   <a:moveTo>
                     <a:pt x="0" y="0"/>
                   </a:moveTo>
                   <a:lnTo>
-                    <a:pt x="7499913" y="0"/>
+                    <a:pt x="7495890" y="0"/>
                   </a:lnTo>
                   <a:lnTo>
-                    <a:pt x="7499913" y="0"/>
+                    <a:pt x="7495890" y="0"/>
                   </a:lnTo>
                 </a:path>
               </a:pathLst>
@@ -3330,21 +3330,21 @@
           </p:nvSpPr>
           <p:spPr>
             <a:xfrm>
-              <a:off x="1061087" y="1454500"/>
-              <a:ext cx="7499913" cy="0"/>
+              <a:off x="1065110" y="1454506"/>
+              <a:ext cx="7495890" cy="0"/>
             </a:xfrm>
             <a:custGeom>
               <a:avLst/>
               <a:pathLst>
-                <a:path w="7499913" h="0">
+                <a:path w="7495890" h="0">
                   <a:moveTo>
                     <a:pt x="0" y="0"/>
                   </a:moveTo>
                   <a:lnTo>
-                    <a:pt x="7499913" y="0"/>
+                    <a:pt x="7495890" y="0"/>
                   </a:lnTo>
                   <a:lnTo>
-                    <a:pt x="7499913" y="0"/>
+                    <a:pt x="7495890" y="0"/>
                   </a:lnTo>
                 </a:path>
               </a:pathLst>
@@ -3373,15 +3373,15 @@
           </p:nvSpPr>
           <p:spPr>
             <a:xfrm>
-              <a:off x="2250986" y="1441338"/>
-              <a:ext cx="0" cy="4536564"/>
+              <a:off x="2254371" y="1441338"/>
+              <a:ext cx="0" cy="4538850"/>
             </a:xfrm>
             <a:custGeom>
               <a:avLst/>
               <a:pathLst>
-                <a:path w="0" h="4536564">
+                <a:path w="0" h="4538850">
                   <a:moveTo>
-                    <a:pt x="0" y="4536564"/>
+                    <a:pt x="0" y="4538850"/>
                   </a:moveTo>
                   <a:lnTo>
                     <a:pt x="0" y="0"/>
@@ -3416,15 +3416,15 @@
           </p:nvSpPr>
           <p:spPr>
             <a:xfrm>
-              <a:off x="3994301" y="1441338"/>
-              <a:ext cx="0" cy="4536564"/>
+              <a:off x="3996750" y="1441338"/>
+              <a:ext cx="0" cy="4538850"/>
             </a:xfrm>
             <a:custGeom>
               <a:avLst/>
               <a:pathLst>
-                <a:path w="0" h="4536564">
+                <a:path w="0" h="4538850">
                   <a:moveTo>
-                    <a:pt x="0" y="4536564"/>
+                    <a:pt x="0" y="4538850"/>
                   </a:moveTo>
                   <a:lnTo>
                     <a:pt x="0" y="0"/>
@@ -3459,15 +3459,15 @@
           </p:nvSpPr>
           <p:spPr>
             <a:xfrm>
-              <a:off x="5737615" y="1441338"/>
-              <a:ext cx="0" cy="4536564"/>
+              <a:off x="5739130" y="1441338"/>
+              <a:ext cx="0" cy="4538850"/>
             </a:xfrm>
             <a:custGeom>
               <a:avLst/>
               <a:pathLst>
-                <a:path w="0" h="4536564">
+                <a:path w="0" h="4538850">
                   <a:moveTo>
-                    <a:pt x="0" y="4536564"/>
+                    <a:pt x="0" y="4538850"/>
                   </a:moveTo>
                   <a:lnTo>
                     <a:pt x="0" y="0"/>
@@ -3502,15 +3502,15 @@
           </p:nvSpPr>
           <p:spPr>
             <a:xfrm>
-              <a:off x="7480930" y="1441338"/>
-              <a:ext cx="0" cy="4536564"/>
+              <a:off x="7481509" y="1441338"/>
+              <a:ext cx="0" cy="4538850"/>
             </a:xfrm>
             <a:custGeom>
               <a:avLst/>
               <a:pathLst>
-                <a:path w="0" h="4536564">
+                <a:path w="0" h="4538850">
                   <a:moveTo>
-                    <a:pt x="0" y="4536564"/>
+                    <a:pt x="0" y="4538850"/>
                   </a:moveTo>
                   <a:lnTo>
                     <a:pt x="0" y="0"/>
@@ -3545,7 +3545,7 @@
           </p:nvSpPr>
           <p:spPr>
             <a:xfrm>
-              <a:off x="3298766" y="3878365"/>
+              <a:off x="3301571" y="3879610"/>
               <a:ext cx="66150" cy="66150"/>
             </a:xfrm>
             <a:prstGeom prst="ellipse">
@@ -3580,7 +3580,7 @@
           </p:nvSpPr>
           <p:spPr>
             <a:xfrm>
-              <a:off x="3743311" y="3878365"/>
+              <a:off x="3745878" y="3879610"/>
               <a:ext cx="66150" cy="66150"/>
             </a:xfrm>
             <a:prstGeom prst="ellipse">
@@ -3615,7 +3615,7 @@
           </p:nvSpPr>
           <p:spPr>
             <a:xfrm>
-              <a:off x="2775772" y="3562473"/>
+              <a:off x="2778857" y="3563558"/>
               <a:ext cx="66150" cy="66150"/>
             </a:xfrm>
             <a:prstGeom prst="ellipse">
@@ -3650,7 +3650,7 @@
           </p:nvSpPr>
           <p:spPr>
             <a:xfrm>
-              <a:off x="4336038" y="3808167"/>
+              <a:off x="4338287" y="3809376"/>
               <a:ext cx="66150" cy="66150"/>
             </a:xfrm>
             <a:prstGeom prst="ellipse">
@@ -3685,7 +3685,7 @@
           </p:nvSpPr>
           <p:spPr>
             <a:xfrm>
-              <a:off x="4728284" y="4282005"/>
+              <a:off x="4730322" y="4283453"/>
               <a:ext cx="66150" cy="66150"/>
             </a:xfrm>
             <a:prstGeom prst="ellipse">
@@ -3720,7 +3720,7 @@
           </p:nvSpPr>
           <p:spPr>
             <a:xfrm>
-              <a:off x="4763150" y="4387303"/>
+              <a:off x="4765170" y="4388804"/>
               <a:ext cx="66150" cy="66150"/>
             </a:xfrm>
             <a:prstGeom prst="ellipse">
@@ -3755,7 +3755,7 @@
           </p:nvSpPr>
           <p:spPr>
             <a:xfrm>
-              <a:off x="4954915" y="5054186"/>
+              <a:off x="4956832" y="5056024"/>
               <a:ext cx="66150" cy="66150"/>
             </a:xfrm>
             <a:prstGeom prst="ellipse">
@@ -3790,7 +3790,7 @@
           </p:nvSpPr>
           <p:spPr>
             <a:xfrm>
-              <a:off x="4292455" y="3281679"/>
+              <a:off x="4294728" y="3282623"/>
               <a:ext cx="66150" cy="66150"/>
             </a:xfrm>
             <a:prstGeom prst="ellipse">
@@ -3825,7 +3825,7 @@
           </p:nvSpPr>
           <p:spPr>
             <a:xfrm>
-              <a:off x="4222723" y="3562473"/>
+              <a:off x="4225032" y="3563558"/>
               <a:ext cx="66150" cy="66150"/>
             </a:xfrm>
             <a:prstGeom prst="ellipse">
@@ -3860,7 +3860,7 @@
           </p:nvSpPr>
           <p:spPr>
             <a:xfrm>
-              <a:off x="4728284" y="4194257"/>
+              <a:off x="4730322" y="4195661"/>
               <a:ext cx="66150" cy="66150"/>
             </a:xfrm>
             <a:prstGeom prst="ellipse">
@@ -3895,7 +3895,7 @@
           </p:nvSpPr>
           <p:spPr>
             <a:xfrm>
-              <a:off x="4728284" y="4439951"/>
+              <a:off x="4730322" y="4441479"/>
               <a:ext cx="66150" cy="66150"/>
             </a:xfrm>
             <a:prstGeom prst="ellipse">
@@ -3930,7 +3930,7 @@
           </p:nvSpPr>
           <p:spPr>
             <a:xfrm>
-              <a:off x="5826572" y="4685645"/>
+              <a:off x="5828021" y="4687297"/>
               <a:ext cx="66150" cy="66150"/>
             </a:xfrm>
             <a:prstGeom prst="ellipse">
@@ -3965,7 +3965,7 @@
           </p:nvSpPr>
           <p:spPr>
             <a:xfrm>
-              <a:off x="5233845" y="4527699"/>
+              <a:off x="5235612" y="4529271"/>
               <a:ext cx="66150" cy="66150"/>
             </a:xfrm>
             <a:prstGeom prst="ellipse">
@@ -4000,7 +4000,7 @@
           </p:nvSpPr>
           <p:spPr>
             <a:xfrm>
-              <a:off x="5321011" y="4896240"/>
+              <a:off x="5322731" y="4897998"/>
               <a:ext cx="66150" cy="66150"/>
             </a:xfrm>
             <a:prstGeom prst="ellipse">
@@ -4035,7 +4035,7 @@
           </p:nvSpPr>
           <p:spPr>
             <a:xfrm>
-              <a:off x="7883684" y="5738620"/>
+              <a:off x="7884029" y="5740802"/>
               <a:ext cx="66150" cy="66150"/>
             </a:xfrm>
             <a:prstGeom prst="ellipse">
@@ -4070,7 +4070,7 @@
           </p:nvSpPr>
           <p:spPr>
             <a:xfrm>
-              <a:off x="8187020" y="5738620"/>
+              <a:off x="8187203" y="5740802"/>
               <a:ext cx="66150" cy="66150"/>
             </a:xfrm>
             <a:prstGeom prst="ellipse">
@@ -4105,7 +4105,7 @@
           </p:nvSpPr>
           <p:spPr>
             <a:xfrm>
-              <a:off x="8049298" y="4983988"/>
+              <a:off x="8049555" y="4985790"/>
               <a:ext cx="66150" cy="66150"/>
             </a:xfrm>
             <a:prstGeom prst="ellipse">
@@ -4140,7 +4140,7 @@
           </p:nvSpPr>
           <p:spPr>
             <a:xfrm>
-              <a:off x="2566574" y="1877714"/>
+              <a:off x="2569772" y="1877950"/>
               <a:ext cx="66150" cy="66150"/>
             </a:xfrm>
             <a:prstGeom prst="ellipse">
@@ -4175,7 +4175,7 @@
           </p:nvSpPr>
           <p:spPr>
             <a:xfrm>
-              <a:off x="1546735" y="2228705"/>
+              <a:off x="1550480" y="2229119"/>
               <a:ext cx="66150" cy="66150"/>
             </a:xfrm>
             <a:prstGeom prst="ellipse">
@@ -4210,7 +4210,7 @@
           </p:nvSpPr>
           <p:spPr>
             <a:xfrm>
-              <a:off x="1930264" y="1614470"/>
+              <a:off x="1933803" y="1614574"/>
               <a:ext cx="66150" cy="66150"/>
             </a:xfrm>
             <a:prstGeom prst="ellipse">
@@ -4245,7 +4245,7 @@
           </p:nvSpPr>
           <p:spPr>
             <a:xfrm>
-              <a:off x="3028552" y="3790617"/>
+              <a:off x="3031502" y="3791818"/>
               <a:ext cx="66150" cy="66150"/>
             </a:xfrm>
             <a:prstGeom prst="ellipse">
@@ -4280,7 +4280,7 @@
           </p:nvSpPr>
           <p:spPr>
             <a:xfrm>
-              <a:off x="4867749" y="4843591"/>
+              <a:off x="4869713" y="4845323"/>
               <a:ext cx="66150" cy="66150"/>
             </a:xfrm>
             <a:prstGeom prst="ellipse">
@@ -4315,7 +4315,7 @@
           </p:nvSpPr>
           <p:spPr>
             <a:xfrm>
-              <a:off x="4719567" y="4896240"/>
+              <a:off x="4721610" y="4897998"/>
               <a:ext cx="66150" cy="66150"/>
             </a:xfrm>
             <a:prstGeom prst="ellipse">
@@ -4350,7 +4350,7 @@
           </p:nvSpPr>
           <p:spPr>
             <a:xfrm>
-              <a:off x="5425610" y="5229682"/>
+              <a:off x="5427274" y="5231608"/>
               <a:ext cx="66150" cy="66150"/>
             </a:xfrm>
             <a:prstGeom prst="ellipse">
@@ -4385,7 +4385,7 @@
           </p:nvSpPr>
           <p:spPr>
             <a:xfrm>
-              <a:off x="5434326" y="4194257"/>
+              <a:off x="5435986" y="4195661"/>
               <a:ext cx="66150" cy="66150"/>
             </a:xfrm>
             <a:prstGeom prst="ellipse">
@@ -4420,7 +4420,7 @@
           </p:nvSpPr>
           <p:spPr>
             <a:xfrm>
-              <a:off x="2104596" y="2772742"/>
+              <a:off x="2108041" y="2773429"/>
               <a:ext cx="66150" cy="66150"/>
             </a:xfrm>
             <a:prstGeom prst="ellipse">
@@ -4455,7 +4455,7 @@
           </p:nvSpPr>
           <p:spPr>
             <a:xfrm>
-              <a:off x="2461975" y="3000886"/>
+              <a:off x="2465229" y="3001689"/>
               <a:ext cx="66150" cy="66150"/>
             </a:xfrm>
             <a:prstGeom prst="ellipse">
@@ -4490,7 +4490,7 @@
           </p:nvSpPr>
           <p:spPr>
             <a:xfrm>
-              <a:off x="1368917" y="2228705"/>
+              <a:off x="1372757" y="2229119"/>
               <a:ext cx="66150" cy="66150"/>
             </a:xfrm>
             <a:prstGeom prst="ellipse">
@@ -4525,7 +4525,7 @@
           </p:nvSpPr>
           <p:spPr>
             <a:xfrm>
-              <a:off x="4257589" y="4790943"/>
+              <a:off x="4259880" y="4792647"/>
               <a:ext cx="66150" cy="66150"/>
             </a:xfrm>
             <a:prstGeom prst="ellipse">
@@ -4560,7 +4560,7 @@
           </p:nvSpPr>
           <p:spPr>
             <a:xfrm>
-              <a:off x="3560263" y="4106509"/>
+              <a:off x="3562928" y="4107869"/>
               <a:ext cx="66150" cy="66150"/>
             </a:xfrm>
             <a:prstGeom prst="ellipse">
@@ -4595,7 +4595,7 @@
           </p:nvSpPr>
           <p:spPr>
             <a:xfrm>
-              <a:off x="4954915" y="4931339"/>
+              <a:off x="4956832" y="4933115"/>
               <a:ext cx="66150" cy="66150"/>
             </a:xfrm>
             <a:prstGeom prst="ellipse">
@@ -4630,7 +4630,7 @@
           </p:nvSpPr>
           <p:spPr>
             <a:xfrm>
-              <a:off x="3577696" y="3808167"/>
+              <a:off x="3580352" y="3809376"/>
               <a:ext cx="66150" cy="66150"/>
             </a:xfrm>
             <a:prstGeom prst="ellipse">
@@ -4665,8 +4665,8 @@
           </p:nvSpPr>
           <p:spPr>
             <a:xfrm>
-              <a:off x="874098" y="5801842"/>
-              <a:ext cx="124358" cy="80101"/>
+              <a:off x="872818" y="5804563"/>
+              <a:ext cx="129661" cy="79095"/>
             </a:xfrm>
             <a:prstGeom prst="rect">
               <a:avLst/>
@@ -4695,8 +4695,8 @@
                       <a:alpha val="100000"/>
                     </a:srgbClr>
                   </a:solidFill>
-                  <a:latin typeface="Helvetica"/>
-                  <a:cs typeface="Helvetica"/>
+                  <a:latin typeface="Avenir Next"/>
+                  <a:cs typeface="Avenir Next"/>
                 </a:rPr>
                 <a:t>10</a:t>
               </a:r>
@@ -4711,8 +4711,8 @@
           </p:nvSpPr>
           <p:spPr>
             <a:xfrm>
-              <a:off x="874098" y="4924364"/>
-              <a:ext cx="124358" cy="80101"/>
+              <a:off x="872818" y="4926642"/>
+              <a:ext cx="129661" cy="79095"/>
             </a:xfrm>
             <a:prstGeom prst="rect">
               <a:avLst/>
@@ -4741,8 +4741,8 @@
                       <a:alpha val="100000"/>
                     </a:srgbClr>
                   </a:solidFill>
-                  <a:latin typeface="Helvetica"/>
-                  <a:cs typeface="Helvetica"/>
+                  <a:latin typeface="Avenir Next"/>
+                  <a:cs typeface="Avenir Next"/>
                 </a:rPr>
                 <a:t>15</a:t>
               </a:r>
@@ -4757,8 +4757,8 @@
           </p:nvSpPr>
           <p:spPr>
             <a:xfrm>
-              <a:off x="874098" y="4046885"/>
-              <a:ext cx="124358" cy="80101"/>
+              <a:off x="872818" y="4048721"/>
+              <a:ext cx="129661" cy="79095"/>
             </a:xfrm>
             <a:prstGeom prst="rect">
               <a:avLst/>
@@ -4787,8 +4787,8 @@
                       <a:alpha val="100000"/>
                     </a:srgbClr>
                   </a:solidFill>
-                  <a:latin typeface="Helvetica"/>
-                  <a:cs typeface="Helvetica"/>
+                  <a:latin typeface="Avenir Next"/>
+                  <a:cs typeface="Avenir Next"/>
                 </a:rPr>
                 <a:t>20</a:t>
               </a:r>
@@ -4803,8 +4803,8 @@
           </p:nvSpPr>
           <p:spPr>
             <a:xfrm>
-              <a:off x="874098" y="3169406"/>
-              <a:ext cx="124358" cy="80101"/>
+              <a:off x="872818" y="3170800"/>
+              <a:ext cx="129661" cy="79095"/>
             </a:xfrm>
             <a:prstGeom prst="rect">
               <a:avLst/>
@@ -4833,8 +4833,8 @@
                       <a:alpha val="100000"/>
                     </a:srgbClr>
                   </a:solidFill>
-                  <a:latin typeface="Helvetica"/>
-                  <a:cs typeface="Helvetica"/>
+                  <a:latin typeface="Avenir Next"/>
+                  <a:cs typeface="Avenir Next"/>
                 </a:rPr>
                 <a:t>25</a:t>
               </a:r>
@@ -4849,8 +4849,8 @@
           </p:nvSpPr>
           <p:spPr>
             <a:xfrm>
-              <a:off x="874098" y="2291928"/>
-              <a:ext cx="124358" cy="80101"/>
+              <a:off x="872818" y="2292879"/>
+              <a:ext cx="129661" cy="79095"/>
             </a:xfrm>
             <a:prstGeom prst="rect">
               <a:avLst/>
@@ -4879,8 +4879,8 @@
                       <a:alpha val="100000"/>
                     </a:srgbClr>
                   </a:solidFill>
-                  <a:latin typeface="Helvetica"/>
-                  <a:cs typeface="Helvetica"/>
+                  <a:latin typeface="Avenir Next"/>
+                  <a:cs typeface="Avenir Next"/>
                 </a:rPr>
                 <a:t>30</a:t>
               </a:r>
@@ -4895,8 +4895,8 @@
           </p:nvSpPr>
           <p:spPr>
             <a:xfrm>
-              <a:off x="874098" y="1414449"/>
-              <a:ext cx="124358" cy="80101"/>
+              <a:off x="872818" y="1414959"/>
+              <a:ext cx="129661" cy="79095"/>
             </a:xfrm>
             <a:prstGeom prst="rect">
               <a:avLst/>
@@ -4925,8 +4925,8 @@
                       <a:alpha val="100000"/>
                     </a:srgbClr>
                   </a:solidFill>
-                  <a:latin typeface="Helvetica"/>
-                  <a:cs typeface="Helvetica"/>
+                  <a:latin typeface="Avenir Next"/>
+                  <a:cs typeface="Avenir Next"/>
                 </a:rPr>
                 <a:t>35</a:t>
               </a:r>
@@ -4941,7 +4941,7 @@
           </p:nvSpPr>
           <p:spPr>
             <a:xfrm>
-              <a:off x="1026292" y="5841893"/>
+              <a:off x="1030315" y="5844110"/>
               <a:ext cx="34794" cy="0"/>
             </a:xfrm>
             <a:custGeom>
@@ -4981,7 +4981,7 @@
           </p:nvSpPr>
           <p:spPr>
             <a:xfrm>
-              <a:off x="1026292" y="4964414"/>
+              <a:off x="1030315" y="4966190"/>
               <a:ext cx="34794" cy="0"/>
             </a:xfrm>
             <a:custGeom>
@@ -5021,7 +5021,7 @@
           </p:nvSpPr>
           <p:spPr>
             <a:xfrm>
-              <a:off x="1026292" y="4086936"/>
+              <a:off x="1030315" y="4088269"/>
               <a:ext cx="34794" cy="0"/>
             </a:xfrm>
             <a:custGeom>
@@ -5061,7 +5061,7 @@
           </p:nvSpPr>
           <p:spPr>
             <a:xfrm>
-              <a:off x="1026292" y="3209457"/>
+              <a:off x="1030315" y="3210348"/>
               <a:ext cx="34794" cy="0"/>
             </a:xfrm>
             <a:custGeom>
@@ -5101,7 +5101,7 @@
           </p:nvSpPr>
           <p:spPr>
             <a:xfrm>
-              <a:off x="1026292" y="2331978"/>
+              <a:off x="1030315" y="2332427"/>
               <a:ext cx="34794" cy="0"/>
             </a:xfrm>
             <a:custGeom>
@@ -5141,7 +5141,7 @@
           </p:nvSpPr>
           <p:spPr>
             <a:xfrm>
-              <a:off x="1026292" y="1454500"/>
+              <a:off x="1030315" y="1454506"/>
               <a:ext cx="34794" cy="0"/>
             </a:xfrm>
             <a:custGeom>
@@ -5181,7 +5181,7 @@
           </p:nvSpPr>
           <p:spPr>
             <a:xfrm>
-              <a:off x="2250986" y="5977902"/>
+              <a:off x="2254371" y="5980188"/>
               <a:ext cx="0" cy="34794"/>
             </a:xfrm>
             <a:custGeom>
@@ -5221,7 +5221,7 @@
           </p:nvSpPr>
           <p:spPr>
             <a:xfrm>
-              <a:off x="3994301" y="5977902"/>
+              <a:off x="3996750" y="5980188"/>
               <a:ext cx="0" cy="34794"/>
             </a:xfrm>
             <a:custGeom>
@@ -5261,7 +5261,7 @@
           </p:nvSpPr>
           <p:spPr>
             <a:xfrm>
-              <a:off x="5737615" y="5977902"/>
+              <a:off x="5739130" y="5980188"/>
               <a:ext cx="0" cy="34794"/>
             </a:xfrm>
             <a:custGeom>
@@ -5301,7 +5301,7 @@
           </p:nvSpPr>
           <p:spPr>
             <a:xfrm>
-              <a:off x="7480930" y="5977902"/>
+              <a:off x="7481509" y="5980188"/>
               <a:ext cx="0" cy="34794"/>
             </a:xfrm>
             <a:custGeom>
@@ -5341,8 +5341,8 @@
           </p:nvSpPr>
           <p:spPr>
             <a:xfrm>
-              <a:off x="2219896" y="6040532"/>
-              <a:ext cx="62179" cy="80101"/>
+              <a:off x="2221956" y="6042818"/>
+              <a:ext cx="64830" cy="79095"/>
             </a:xfrm>
             <a:prstGeom prst="rect">
               <a:avLst/>
@@ -5371,8 +5371,8 @@
                       <a:alpha val="100000"/>
                     </a:srgbClr>
                   </a:solidFill>
-                  <a:latin typeface="Helvetica"/>
-                  <a:cs typeface="Helvetica"/>
+                  <a:latin typeface="Avenir Next"/>
+                  <a:cs typeface="Avenir Next"/>
                 </a:rPr>
                 <a:t>2</a:t>
               </a:r>
@@ -5387,8 +5387,8 @@
           </p:nvSpPr>
           <p:spPr>
             <a:xfrm>
-              <a:off x="3963211" y="6040532"/>
-              <a:ext cx="62179" cy="80101"/>
+              <a:off x="3964335" y="6042818"/>
+              <a:ext cx="64830" cy="79095"/>
             </a:xfrm>
             <a:prstGeom prst="rect">
               <a:avLst/>
@@ -5417,8 +5417,8 @@
                       <a:alpha val="100000"/>
                     </a:srgbClr>
                   </a:solidFill>
-                  <a:latin typeface="Helvetica"/>
-                  <a:cs typeface="Helvetica"/>
+                  <a:latin typeface="Avenir Next"/>
+                  <a:cs typeface="Avenir Next"/>
                 </a:rPr>
                 <a:t>3</a:t>
               </a:r>
@@ -5433,8 +5433,8 @@
           </p:nvSpPr>
           <p:spPr>
             <a:xfrm>
-              <a:off x="5706526" y="6040532"/>
-              <a:ext cx="62179" cy="80101"/>
+              <a:off x="5706714" y="6042818"/>
+              <a:ext cx="64830" cy="79095"/>
             </a:xfrm>
             <a:prstGeom prst="rect">
               <a:avLst/>
@@ -5463,8 +5463,8 @@
                       <a:alpha val="100000"/>
                     </a:srgbClr>
                   </a:solidFill>
-                  <a:latin typeface="Helvetica"/>
-                  <a:cs typeface="Helvetica"/>
+                  <a:latin typeface="Avenir Next"/>
+                  <a:cs typeface="Avenir Next"/>
                 </a:rPr>
                 <a:t>4</a:t>
               </a:r>
@@ -5479,8 +5479,8 @@
           </p:nvSpPr>
           <p:spPr>
             <a:xfrm>
-              <a:off x="7449840" y="6040532"/>
-              <a:ext cx="62179" cy="80101"/>
+              <a:off x="7449094" y="6042818"/>
+              <a:ext cx="64830" cy="79095"/>
             </a:xfrm>
             <a:prstGeom prst="rect">
               <a:avLst/>
@@ -5509,8 +5509,8 @@
                       <a:alpha val="100000"/>
                     </a:srgbClr>
                   </a:solidFill>
-                  <a:latin typeface="Helvetica"/>
-                  <a:cs typeface="Helvetica"/>
+                  <a:latin typeface="Avenir Next"/>
+                  <a:cs typeface="Avenir Next"/>
                 </a:rPr>
                 <a:t>5</a:t>
               </a:r>
@@ -5525,8 +5525,8 @@
           </p:nvSpPr>
           <p:spPr>
             <a:xfrm>
-              <a:off x="4741229" y="6180208"/>
-              <a:ext cx="139628" cy="100218"/>
+              <a:off x="4738806" y="6181489"/>
+              <a:ext cx="148498" cy="98938"/>
             </a:xfrm>
             <a:prstGeom prst="rect">
               <a:avLst/>
@@ -5555,8 +5555,8 @@
                       <a:alpha val="100000"/>
                     </a:srgbClr>
                   </a:solidFill>
-                  <a:latin typeface="Helvetica"/>
-                  <a:cs typeface="Helvetica"/>
+                  <a:latin typeface="Avenir Next"/>
+                  <a:cs typeface="Avenir Next"/>
                 </a:rPr>
                 <a:t>wt</a:t>
               </a:r>
@@ -5571,8 +5571,8 @@
           </p:nvSpPr>
           <p:spPr>
             <a:xfrm rot="-5400000">
-              <a:off x="622362" y="3659511"/>
-              <a:ext cx="271851" cy="100218"/>
+              <a:off x="607457" y="3661294"/>
+              <a:ext cx="300380" cy="98938"/>
             </a:xfrm>
             <a:prstGeom prst="rect">
               <a:avLst/>
@@ -5601,8 +5601,8 @@
                       <a:alpha val="100000"/>
                     </a:srgbClr>
                   </a:solidFill>
-                  <a:latin typeface="Helvetica"/>
-                  <a:cs typeface="Helvetica"/>
+                  <a:latin typeface="Avenir Next"/>
+                  <a:cs typeface="Avenir Next"/>
                 </a:rPr>
                 <a:t>mpg</a:t>
               </a:r>
@@ -5765,8 +5765,8 @@
           </p:nvSpPr>
           <p:spPr>
             <a:xfrm>
-              <a:off x="843435" y="1463188"/>
-              <a:ext cx="7677426" cy="4280621"/>
+              <a:off x="848922" y="1463189"/>
+              <a:ext cx="7671939" cy="4284827"/>
             </a:xfrm>
             <a:prstGeom prst="rect">
               <a:avLst/>
@@ -5791,21 +5791,21 @@
           </p:nvSpPr>
           <p:spPr>
             <a:xfrm>
-              <a:off x="843435" y="5064667"/>
-              <a:ext cx="7677426" cy="0"/>
+              <a:off x="848922" y="5068206"/>
+              <a:ext cx="7671939" cy="0"/>
             </a:xfrm>
             <a:custGeom>
               <a:avLst/>
               <a:pathLst>
-                <a:path w="7677426" h="0">
+                <a:path w="7671939" h="0">
                   <a:moveTo>
                     <a:pt x="0" y="0"/>
                   </a:moveTo>
                   <a:lnTo>
-                    <a:pt x="7677426" y="0"/>
+                    <a:pt x="7671939" y="0"/>
                   </a:lnTo>
                   <a:lnTo>
-                    <a:pt x="7677426" y="0"/>
+                    <a:pt x="7671939" y="0"/>
                   </a:lnTo>
                 </a:path>
               </a:pathLst>
@@ -5834,21 +5834,21 @@
           </p:nvSpPr>
           <p:spPr>
             <a:xfrm>
-              <a:off x="843435" y="4069660"/>
-              <a:ext cx="7677426" cy="0"/>
+              <a:off x="848922" y="4072221"/>
+              <a:ext cx="7671939" cy="0"/>
             </a:xfrm>
             <a:custGeom>
               <a:avLst/>
               <a:pathLst>
-                <a:path w="7677426" h="0">
+                <a:path w="7671939" h="0">
                   <a:moveTo>
                     <a:pt x="0" y="0"/>
                   </a:moveTo>
                   <a:lnTo>
-                    <a:pt x="7677426" y="0"/>
+                    <a:pt x="7671939" y="0"/>
                   </a:lnTo>
                   <a:lnTo>
-                    <a:pt x="7677426" y="0"/>
+                    <a:pt x="7671939" y="0"/>
                   </a:lnTo>
                 </a:path>
               </a:pathLst>
@@ -5877,21 +5877,21 @@
           </p:nvSpPr>
           <p:spPr>
             <a:xfrm>
-              <a:off x="843435" y="3074653"/>
-              <a:ext cx="7677426" cy="0"/>
+              <a:off x="848922" y="3076236"/>
+              <a:ext cx="7671939" cy="0"/>
             </a:xfrm>
             <a:custGeom>
               <a:avLst/>
               <a:pathLst>
-                <a:path w="7677426" h="0">
+                <a:path w="7671939" h="0">
                   <a:moveTo>
                     <a:pt x="0" y="0"/>
                   </a:moveTo>
                   <a:lnTo>
-                    <a:pt x="7677426" y="0"/>
+                    <a:pt x="7671939" y="0"/>
                   </a:lnTo>
                   <a:lnTo>
-                    <a:pt x="7677426" y="0"/>
+                    <a:pt x="7671939" y="0"/>
                   </a:lnTo>
                 </a:path>
               </a:pathLst>
@@ -5920,21 +5920,21 @@
           </p:nvSpPr>
           <p:spPr>
             <a:xfrm>
-              <a:off x="843435" y="2079645"/>
-              <a:ext cx="7677426" cy="0"/>
+              <a:off x="848922" y="2080251"/>
+              <a:ext cx="7671939" cy="0"/>
             </a:xfrm>
             <a:custGeom>
               <a:avLst/>
               <a:pathLst>
-                <a:path w="7677426" h="0">
+                <a:path w="7671939" h="0">
                   <a:moveTo>
                     <a:pt x="0" y="0"/>
                   </a:moveTo>
                   <a:lnTo>
-                    <a:pt x="7677426" y="0"/>
+                    <a:pt x="7671939" y="0"/>
                   </a:lnTo>
                   <a:lnTo>
-                    <a:pt x="7677426" y="0"/>
+                    <a:pt x="7671939" y="0"/>
                   </a:lnTo>
                 </a:path>
               </a:pathLst>
@@ -5963,7 +5963,7 @@
           </p:nvSpPr>
           <p:spPr>
             <a:xfrm>
-              <a:off x="4307524" y="4414688"/>
+              <a:off x="4310512" y="4417621"/>
               <a:ext cx="66150" cy="66150"/>
             </a:xfrm>
             <a:prstGeom prst="ellipse">
@@ -5998,7 +5998,7 @@
           </p:nvSpPr>
           <p:spPr>
             <a:xfrm>
-              <a:off x="4307524" y="4160961"/>
+              <a:off x="4310512" y="4163644"/>
               <a:ext cx="66150" cy="66150"/>
             </a:xfrm>
             <a:prstGeom prst="ellipse">
@@ -6033,7 +6033,7 @@
           </p:nvSpPr>
           <p:spPr>
             <a:xfrm>
-              <a:off x="4842123" y="4713190"/>
+              <a:off x="4844728" y="4716416"/>
               <a:ext cx="66150" cy="66150"/>
             </a:xfrm>
             <a:prstGeom prst="ellipse">
@@ -6068,7 +6068,7 @@
           </p:nvSpPr>
           <p:spPr>
             <a:xfrm>
-              <a:off x="4426324" y="3822658"/>
+              <a:off x="4429226" y="3825009"/>
               <a:ext cx="66150" cy="66150"/>
             </a:xfrm>
             <a:prstGeom prst="ellipse">
@@ -6103,7 +6103,7 @@
           </p:nvSpPr>
           <p:spPr>
             <a:xfrm>
-              <a:off x="3624427" y="3598782"/>
+              <a:off x="3627902" y="3600913"/>
               <a:ext cx="66150" cy="66150"/>
             </a:xfrm>
             <a:prstGeom prst="ellipse">
@@ -6138,7 +6138,7 @@
           </p:nvSpPr>
           <p:spPr>
             <a:xfrm>
-              <a:off x="3446227" y="3578882"/>
+              <a:off x="3449830" y="3580993"/>
               <a:ext cx="66150" cy="66150"/>
             </a:xfrm>
             <a:prstGeom prst="ellipse">
@@ -6173,7 +6173,7 @@
           </p:nvSpPr>
           <p:spPr>
             <a:xfrm>
-              <a:off x="2317631" y="3469431"/>
+              <a:off x="2322040" y="3471435"/>
               <a:ext cx="66150" cy="66150"/>
             </a:xfrm>
             <a:prstGeom prst="ellipse">
@@ -6208,7 +6208,7 @@
           </p:nvSpPr>
           <p:spPr>
             <a:xfrm>
-              <a:off x="5317321" y="3847534"/>
+              <a:off x="5319587" y="3849909"/>
               <a:ext cx="66150" cy="66150"/>
             </a:xfrm>
             <a:prstGeom prst="ellipse">
@@ -6243,7 +6243,7 @@
           </p:nvSpPr>
           <p:spPr>
             <a:xfrm>
-              <a:off x="4842123" y="3887334"/>
+              <a:off x="4844728" y="3889748"/>
               <a:ext cx="66150" cy="66150"/>
             </a:xfrm>
             <a:prstGeom prst="ellipse">
@@ -6278,7 +6278,7 @@
           </p:nvSpPr>
           <p:spPr>
             <a:xfrm>
-              <a:off x="3772926" y="3598782"/>
+              <a:off x="3776295" y="3600913"/>
               <a:ext cx="66150" cy="66150"/>
             </a:xfrm>
             <a:prstGeom prst="ellipse">
@@ -6313,7 +6313,7 @@
           </p:nvSpPr>
           <p:spPr>
             <a:xfrm>
-              <a:off x="3357127" y="3598782"/>
+              <a:off x="3360794" y="3600913"/>
               <a:ext cx="66150" cy="66150"/>
             </a:xfrm>
             <a:prstGeom prst="ellipse">
@@ -6348,7 +6348,7 @@
           </p:nvSpPr>
           <p:spPr>
             <a:xfrm>
-              <a:off x="2941329" y="2971927"/>
+              <a:off x="2945292" y="2973442"/>
               <a:ext cx="66150" cy="66150"/>
             </a:xfrm>
             <a:prstGeom prst="ellipse">
@@ -6383,7 +6383,7 @@
           </p:nvSpPr>
           <p:spPr>
             <a:xfrm>
-              <a:off x="3208628" y="3310230"/>
+              <a:off x="3212400" y="3312077"/>
               <a:ext cx="66150" cy="66150"/>
             </a:xfrm>
             <a:prstGeom prst="ellipse">
@@ -6418,7 +6418,7 @@
           </p:nvSpPr>
           <p:spPr>
             <a:xfrm>
-              <a:off x="2584930" y="3260479"/>
+              <a:off x="2589148" y="3262278"/>
               <a:ext cx="66150" cy="66150"/>
             </a:xfrm>
             <a:prstGeom prst="ellipse">
@@ -6453,7 +6453,7 @@
           </p:nvSpPr>
           <p:spPr>
             <a:xfrm>
-              <a:off x="1159334" y="1797818"/>
+              <a:off x="1164571" y="1798180"/>
               <a:ext cx="66150" cy="66150"/>
             </a:xfrm>
             <a:prstGeom prst="ellipse">
@@ -6488,7 +6488,7 @@
           </p:nvSpPr>
           <p:spPr>
             <a:xfrm>
-              <a:off x="1159334" y="1624687"/>
+              <a:off x="1164571" y="1624878"/>
               <a:ext cx="66150" cy="66150"/>
             </a:xfrm>
             <a:prstGeom prst="ellipse">
@@ -6523,7 +6523,7 @@
           </p:nvSpPr>
           <p:spPr>
             <a:xfrm>
-              <a:off x="2436430" y="1703293"/>
+              <a:off x="2440755" y="1703561"/>
               <a:ext cx="66150" cy="66150"/>
             </a:xfrm>
             <a:prstGeom prst="ellipse">
@@ -6558,7 +6558,7 @@
           </p:nvSpPr>
           <p:spPr>
             <a:xfrm>
-              <a:off x="7693314" y="4832591"/>
+              <a:off x="7693882" y="4835934"/>
               <a:ext cx="66150" cy="66150"/>
             </a:xfrm>
             <a:prstGeom prst="ellipse">
@@ -6593,7 +6593,7 @@
           </p:nvSpPr>
           <p:spPr>
             <a:xfrm>
-              <a:off x="7099316" y="5414670"/>
+              <a:off x="7100308" y="5418586"/>
               <a:ext cx="66150" cy="66150"/>
             </a:xfrm>
             <a:prstGeom prst="ellipse">
@@ -6628,7 +6628,7 @@
           </p:nvSpPr>
           <p:spPr>
             <a:xfrm>
-              <a:off x="8138813" y="5195769"/>
+              <a:off x="8139062" y="5199469"/>
               <a:ext cx="66150" cy="66150"/>
             </a:xfrm>
             <a:prstGeom prst="ellipse">
@@ -6663,7 +6663,7 @@
           </p:nvSpPr>
           <p:spPr>
             <a:xfrm>
-              <a:off x="4456024" y="4568914"/>
+              <a:off x="4458905" y="4571998"/>
               <a:ext cx="66150" cy="66150"/>
             </a:xfrm>
             <a:prstGeom prst="ellipse">
@@ -6698,7 +6698,7 @@
           </p:nvSpPr>
           <p:spPr>
             <a:xfrm>
-              <a:off x="2674029" y="3519181"/>
+              <a:off x="2678184" y="3521234"/>
               <a:ext cx="66150" cy="66150"/>
             </a:xfrm>
             <a:prstGeom prst="ellipse">
@@ -6733,7 +6733,7 @@
           </p:nvSpPr>
           <p:spPr>
             <a:xfrm>
-              <a:off x="2584930" y="3603757"/>
+              <a:off x="2589148" y="3605893"/>
               <a:ext cx="66150" cy="66150"/>
             </a:xfrm>
             <a:prstGeom prst="ellipse">
@@ -6768,7 +6768,7 @@
           </p:nvSpPr>
           <p:spPr>
             <a:xfrm>
-              <a:off x="2020631" y="3200779"/>
+              <a:off x="2025253" y="3202519"/>
               <a:ext cx="66150" cy="66150"/>
             </a:xfrm>
             <a:prstGeom prst="ellipse">
@@ -6803,7 +6803,7 @@
           </p:nvSpPr>
           <p:spPr>
             <a:xfrm>
-              <a:off x="3772926" y="3195804"/>
+              <a:off x="3776295" y="3197539"/>
               <a:ext cx="66150" cy="66150"/>
             </a:xfrm>
             <a:prstGeom prst="ellipse">
@@ -6838,7 +6838,7 @@
           </p:nvSpPr>
           <p:spPr>
             <a:xfrm>
-              <a:off x="6178619" y="5096268"/>
+              <a:off x="6180269" y="5099870"/>
               <a:ext cx="66150" cy="66150"/>
             </a:xfrm>
             <a:prstGeom prst="ellipse">
@@ -6873,7 +6873,7 @@
           </p:nvSpPr>
           <p:spPr>
             <a:xfrm>
-              <a:off x="5792520" y="4892291"/>
+              <a:off x="5794446" y="4895693"/>
               <a:ext cx="66150" cy="66150"/>
             </a:xfrm>
             <a:prstGeom prst="ellipse">
@@ -6908,7 +6908,7 @@
           </p:nvSpPr>
           <p:spPr>
             <a:xfrm>
-              <a:off x="7099316" y="5516161"/>
+              <a:off x="7100308" y="5520176"/>
               <a:ext cx="66150" cy="66150"/>
             </a:xfrm>
             <a:prstGeom prst="ellipse">
@@ -6943,7 +6943,7 @@
           </p:nvSpPr>
           <p:spPr>
             <a:xfrm>
-              <a:off x="2763129" y="3867434"/>
+              <a:off x="2767220" y="3869829"/>
               <a:ext cx="66150" cy="66150"/>
             </a:xfrm>
             <a:prstGeom prst="ellipse">
@@ -6978,7 +6978,7 @@
           </p:nvSpPr>
           <p:spPr>
             <a:xfrm>
-              <a:off x="3921426" y="4265437"/>
+              <a:off x="3924689" y="4268223"/>
               <a:ext cx="66150" cy="66150"/>
             </a:xfrm>
             <a:prstGeom prst="ellipse">
@@ -7013,7 +7013,7 @@
           </p:nvSpPr>
           <p:spPr>
             <a:xfrm>
-              <a:off x="2525530" y="3469431"/>
+              <a:off x="2529791" y="3471435"/>
               <a:ext cx="66150" cy="66150"/>
             </a:xfrm>
             <a:prstGeom prst="ellipse">
@@ -7048,7 +7048,7 @@
           </p:nvSpPr>
           <p:spPr>
             <a:xfrm>
-              <a:off x="4426324" y="4255487"/>
+              <a:off x="4429226" y="4258263"/>
               <a:ext cx="66150" cy="66150"/>
             </a:xfrm>
             <a:prstGeom prst="ellipse">
@@ -7083,8 +7083,8 @@
           </p:nvSpPr>
           <p:spPr>
             <a:xfrm>
-              <a:off x="640418" y="4982691"/>
-              <a:ext cx="127101" cy="163951"/>
+              <a:off x="640418" y="4987282"/>
+              <a:ext cx="132588" cy="161848"/>
             </a:xfrm>
             <a:prstGeom prst="rect">
               <a:avLst/>
@@ -7113,8 +7113,8 @@
                       <a:alpha val="100000"/>
                     </a:srgbClr>
                   </a:solidFill>
-                  <a:latin typeface="Helvetica"/>
-                  <a:cs typeface="Helvetica"/>
+                  <a:latin typeface="Avenir Next"/>
+                  <a:cs typeface="Avenir Next"/>
                 </a:rPr>
                 <a:t>2</a:t>
               </a:r>
@@ -7129,8 +7129,8 @@
           </p:nvSpPr>
           <p:spPr>
             <a:xfrm>
-              <a:off x="640418" y="3987684"/>
-              <a:ext cx="127101" cy="163951"/>
+              <a:off x="640418" y="3991297"/>
+              <a:ext cx="132588" cy="161848"/>
             </a:xfrm>
             <a:prstGeom prst="rect">
               <a:avLst/>
@@ -7159,8 +7159,8 @@
                       <a:alpha val="100000"/>
                     </a:srgbClr>
                   </a:solidFill>
-                  <a:latin typeface="Helvetica"/>
-                  <a:cs typeface="Helvetica"/>
+                  <a:latin typeface="Avenir Next"/>
+                  <a:cs typeface="Avenir Next"/>
                 </a:rPr>
                 <a:t>3</a:t>
               </a:r>
@@ -7175,8 +7175,8 @@
           </p:nvSpPr>
           <p:spPr>
             <a:xfrm>
-              <a:off x="640418" y="2992677"/>
-              <a:ext cx="127101" cy="163951"/>
+              <a:off x="640418" y="2995312"/>
+              <a:ext cx="132588" cy="161848"/>
             </a:xfrm>
             <a:prstGeom prst="rect">
               <a:avLst/>
@@ -7205,8 +7205,8 @@
                       <a:alpha val="100000"/>
                     </a:srgbClr>
                   </a:solidFill>
-                  <a:latin typeface="Helvetica"/>
-                  <a:cs typeface="Helvetica"/>
+                  <a:latin typeface="Avenir Next"/>
+                  <a:cs typeface="Avenir Next"/>
                 </a:rPr>
                 <a:t>4</a:t>
               </a:r>
@@ -7221,8 +7221,8 @@
           </p:nvSpPr>
           <p:spPr>
             <a:xfrm>
-              <a:off x="640418" y="1997669"/>
-              <a:ext cx="127101" cy="163951"/>
+              <a:off x="640418" y="1999327"/>
+              <a:ext cx="132588" cy="161848"/>
             </a:xfrm>
             <a:prstGeom prst="rect">
               <a:avLst/>
@@ -7251,8 +7251,8 @@
                       <a:alpha val="100000"/>
                     </a:srgbClr>
                   </a:solidFill>
-                  <a:latin typeface="Helvetica"/>
-                  <a:cs typeface="Helvetica"/>
+                  <a:latin typeface="Avenir Next"/>
+                  <a:cs typeface="Avenir Next"/>
                 </a:rPr>
                 <a:t>5</a:t>
               </a:r>
@@ -7267,18 +7267,18 @@
           </p:nvSpPr>
           <p:spPr>
             <a:xfrm>
-              <a:off x="843435" y="5743810"/>
-              <a:ext cx="7677426" cy="0"/>
+              <a:off x="848922" y="5748016"/>
+              <a:ext cx="7671939" cy="0"/>
             </a:xfrm>
             <a:custGeom>
               <a:avLst/>
               <a:pathLst>
-                <a:path w="7677426" h="0">
+                <a:path w="7671939" h="0">
                   <a:moveTo>
                     <a:pt x="0" y="0"/>
                   </a:moveTo>
                   <a:lnTo>
-                    <a:pt x="7677426" y="0"/>
+                    <a:pt x="7671939" y="0"/>
                   </a:lnTo>
                 </a:path>
               </a:pathLst>
@@ -7307,7 +7307,7 @@
           </p:nvSpPr>
           <p:spPr>
             <a:xfrm>
-              <a:off x="1073610" y="5743810"/>
+              <a:off x="1078931" y="5748016"/>
               <a:ext cx="0" cy="56936"/>
             </a:xfrm>
             <a:custGeom>
@@ -7347,7 +7347,7 @@
           </p:nvSpPr>
           <p:spPr>
             <a:xfrm>
-              <a:off x="2558605" y="5743810"/>
+              <a:off x="2562866" y="5748016"/>
               <a:ext cx="0" cy="56936"/>
             </a:xfrm>
             <a:custGeom>
@@ -7387,7 +7387,7 @@
           </p:nvSpPr>
           <p:spPr>
             <a:xfrm>
-              <a:off x="4043600" y="5743810"/>
+              <a:off x="4046800" y="5748016"/>
               <a:ext cx="0" cy="56936"/>
             </a:xfrm>
             <a:custGeom>
@@ -7427,7 +7427,7 @@
           </p:nvSpPr>
           <p:spPr>
             <a:xfrm>
-              <a:off x="5528596" y="5743810"/>
+              <a:off x="5530734" y="5748016"/>
               <a:ext cx="0" cy="56936"/>
             </a:xfrm>
             <a:custGeom>
@@ -7467,7 +7467,7 @@
           </p:nvSpPr>
           <p:spPr>
             <a:xfrm>
-              <a:off x="7013591" y="5743810"/>
+              <a:off x="7014668" y="5748016"/>
               <a:ext cx="0" cy="56936"/>
             </a:xfrm>
             <a:custGeom>
@@ -7507,7 +7507,7 @@
           </p:nvSpPr>
           <p:spPr>
             <a:xfrm>
-              <a:off x="8498587" y="5743810"/>
+              <a:off x="8498602" y="5748016"/>
               <a:ext cx="0" cy="56936"/>
             </a:xfrm>
             <a:custGeom>
@@ -7547,8 +7547,8 @@
           </p:nvSpPr>
           <p:spPr>
             <a:xfrm>
-              <a:off x="946508" y="5876662"/>
-              <a:ext cx="254203" cy="163951"/>
+              <a:off x="946343" y="5880868"/>
+              <a:ext cx="265176" cy="161848"/>
             </a:xfrm>
             <a:prstGeom prst="rect">
               <a:avLst/>
@@ -7577,8 +7577,8 @@
                       <a:alpha val="100000"/>
                     </a:srgbClr>
                   </a:solidFill>
-                  <a:latin typeface="Helvetica"/>
-                  <a:cs typeface="Helvetica"/>
+                  <a:latin typeface="Avenir Next"/>
+                  <a:cs typeface="Avenir Next"/>
                 </a:rPr>
                 <a:t>10</a:t>
               </a:r>
@@ -7593,8 +7593,8 @@
           </p:nvSpPr>
           <p:spPr>
             <a:xfrm>
-              <a:off x="2431503" y="5876662"/>
-              <a:ext cx="254203" cy="163951"/>
+              <a:off x="2430278" y="5880868"/>
+              <a:ext cx="265176" cy="161848"/>
             </a:xfrm>
             <a:prstGeom prst="rect">
               <a:avLst/>
@@ -7623,8 +7623,8 @@
                       <a:alpha val="100000"/>
                     </a:srgbClr>
                   </a:solidFill>
-                  <a:latin typeface="Helvetica"/>
-                  <a:cs typeface="Helvetica"/>
+                  <a:latin typeface="Avenir Next"/>
+                  <a:cs typeface="Avenir Next"/>
                 </a:rPr>
                 <a:t>15</a:t>
               </a:r>
@@ -7639,8 +7639,8 @@
           </p:nvSpPr>
           <p:spPr>
             <a:xfrm>
-              <a:off x="3916499" y="5876662"/>
-              <a:ext cx="254203" cy="163951"/>
+              <a:off x="3914212" y="5880868"/>
+              <a:ext cx="265176" cy="161848"/>
             </a:xfrm>
             <a:prstGeom prst="rect">
               <a:avLst/>
@@ -7669,8 +7669,8 @@
                       <a:alpha val="100000"/>
                     </a:srgbClr>
                   </a:solidFill>
-                  <a:latin typeface="Helvetica"/>
-                  <a:cs typeface="Helvetica"/>
+                  <a:latin typeface="Avenir Next"/>
+                  <a:cs typeface="Avenir Next"/>
                 </a:rPr>
                 <a:t>20</a:t>
               </a:r>
@@ -7685,8 +7685,8 @@
           </p:nvSpPr>
           <p:spPr>
             <a:xfrm>
-              <a:off x="5401494" y="5876662"/>
-              <a:ext cx="254203" cy="163951"/>
+              <a:off x="5398146" y="5880868"/>
+              <a:ext cx="265176" cy="161848"/>
             </a:xfrm>
             <a:prstGeom prst="rect">
               <a:avLst/>
@@ -7715,8 +7715,8 @@
                       <a:alpha val="100000"/>
                     </a:srgbClr>
                   </a:solidFill>
-                  <a:latin typeface="Helvetica"/>
-                  <a:cs typeface="Helvetica"/>
+                  <a:latin typeface="Avenir Next"/>
+                  <a:cs typeface="Avenir Next"/>
                 </a:rPr>
                 <a:t>25</a:t>
               </a:r>
@@ -7731,8 +7731,8 @@
           </p:nvSpPr>
           <p:spPr>
             <a:xfrm>
-              <a:off x="6886490" y="5876662"/>
-              <a:ext cx="254203" cy="163951"/>
+              <a:off x="6882080" y="5880868"/>
+              <a:ext cx="265176" cy="161848"/>
             </a:xfrm>
             <a:prstGeom prst="rect">
               <a:avLst/>
@@ -7761,8 +7761,8 @@
                       <a:alpha val="100000"/>
                     </a:srgbClr>
                   </a:solidFill>
-                  <a:latin typeface="Helvetica"/>
-                  <a:cs typeface="Helvetica"/>
+                  <a:latin typeface="Avenir Next"/>
+                  <a:cs typeface="Avenir Next"/>
                 </a:rPr>
                 <a:t>30</a:t>
               </a:r>
@@ -7777,8 +7777,8 @@
           </p:nvSpPr>
           <p:spPr>
             <a:xfrm>
-              <a:off x="8371485" y="5876662"/>
-              <a:ext cx="254203" cy="163951"/>
+              <a:off x="8366014" y="5880868"/>
+              <a:ext cx="265176" cy="161848"/>
             </a:xfrm>
             <a:prstGeom prst="rect">
               <a:avLst/>
@@ -7807,8 +7807,8 @@
                       <a:alpha val="100000"/>
                     </a:srgbClr>
                   </a:solidFill>
-                  <a:latin typeface="Helvetica"/>
-                  <a:cs typeface="Helvetica"/>
+                  <a:latin typeface="Avenir Next"/>
+                  <a:cs typeface="Avenir Next"/>
                 </a:rPr>
                 <a:t>35</a:t>
               </a:r>
@@ -7823,8 +7823,8 @@
           </p:nvSpPr>
           <p:spPr>
             <a:xfrm>
-              <a:off x="4459812" y="6148116"/>
-              <a:ext cx="444672" cy="163951"/>
+              <a:off x="4439101" y="6150219"/>
+              <a:ext cx="491581" cy="161848"/>
             </a:xfrm>
             <a:prstGeom prst="rect">
               <a:avLst/>
@@ -7853,8 +7853,8 @@
                       <a:alpha val="100000"/>
                     </a:srgbClr>
                   </a:solidFill>
-                  <a:latin typeface="Helvetica"/>
-                  <a:cs typeface="Helvetica"/>
+                  <a:latin typeface="Avenir Next"/>
+                  <a:cs typeface="Avenir Next"/>
                 </a:rPr>
                 <a:t>mpg</a:t>
               </a:r>

--- a/tests/testthat/multi_slide_fullslide_43.pptx
+++ b/tests/testthat/multi_slide_fullslide_43.pptx
@@ -2659,8 +2659,8 @@
           </p:nvSpPr>
           <p:spPr>
             <a:xfrm>
-              <a:off x="1065110" y="1441338"/>
-              <a:ext cx="7495890" cy="4538850"/>
+              <a:off x="1067762" y="1441338"/>
+              <a:ext cx="7493238" cy="4534095"/>
             </a:xfrm>
             <a:prstGeom prst="rect">
               <a:avLst/>
@@ -2685,21 +2685,21 @@
           </p:nvSpPr>
           <p:spPr>
             <a:xfrm>
-              <a:off x="1065110" y="5405150"/>
-              <a:ext cx="7495890" cy="0"/>
+              <a:off x="1067762" y="5400998"/>
+              <a:ext cx="7493238" cy="0"/>
             </a:xfrm>
             <a:custGeom>
               <a:avLst/>
               <a:pathLst>
-                <a:path w="7495890" h="0">
+                <a:path w="7493238" h="0">
                   <a:moveTo>
                     <a:pt x="0" y="0"/>
                   </a:moveTo>
                   <a:lnTo>
-                    <a:pt x="7495890" y="0"/>
+                    <a:pt x="7493238" y="0"/>
                   </a:lnTo>
                   <a:lnTo>
-                    <a:pt x="7495890" y="0"/>
+                    <a:pt x="7493238" y="0"/>
                   </a:lnTo>
                 </a:path>
               </a:pathLst>
@@ -2728,21 +2728,21 @@
           </p:nvSpPr>
           <p:spPr>
             <a:xfrm>
-              <a:off x="1065110" y="4527229"/>
-              <a:ext cx="7495890" cy="0"/>
+              <a:off x="1067762" y="4523996"/>
+              <a:ext cx="7493238" cy="0"/>
             </a:xfrm>
             <a:custGeom>
               <a:avLst/>
               <a:pathLst>
-                <a:path w="7495890" h="0">
+                <a:path w="7493238" h="0">
                   <a:moveTo>
                     <a:pt x="0" y="0"/>
                   </a:moveTo>
                   <a:lnTo>
-                    <a:pt x="7495890" y="0"/>
+                    <a:pt x="7493238" y="0"/>
                   </a:lnTo>
                   <a:lnTo>
-                    <a:pt x="7495890" y="0"/>
+                    <a:pt x="7493238" y="0"/>
                   </a:lnTo>
                 </a:path>
               </a:pathLst>
@@ -2771,21 +2771,21 @@
           </p:nvSpPr>
           <p:spPr>
             <a:xfrm>
-              <a:off x="1065110" y="3649308"/>
-              <a:ext cx="7495890" cy="0"/>
+              <a:off x="1067762" y="3646995"/>
+              <a:ext cx="7493238" cy="0"/>
             </a:xfrm>
             <a:custGeom>
               <a:avLst/>
               <a:pathLst>
-                <a:path w="7495890" h="0">
+                <a:path w="7493238" h="0">
                   <a:moveTo>
                     <a:pt x="0" y="0"/>
                   </a:moveTo>
                   <a:lnTo>
-                    <a:pt x="7495890" y="0"/>
+                    <a:pt x="7493238" y="0"/>
                   </a:lnTo>
                   <a:lnTo>
-                    <a:pt x="7495890" y="0"/>
+                    <a:pt x="7493238" y="0"/>
                   </a:lnTo>
                 </a:path>
               </a:pathLst>
@@ -2814,21 +2814,21 @@
           </p:nvSpPr>
           <p:spPr>
             <a:xfrm>
-              <a:off x="1065110" y="2771388"/>
-              <a:ext cx="7495890" cy="0"/>
+              <a:off x="1067762" y="2769994"/>
+              <a:ext cx="7493238" cy="0"/>
             </a:xfrm>
             <a:custGeom>
               <a:avLst/>
               <a:pathLst>
-                <a:path w="7495890" h="0">
+                <a:path w="7493238" h="0">
                   <a:moveTo>
                     <a:pt x="0" y="0"/>
                   </a:moveTo>
                   <a:lnTo>
-                    <a:pt x="7495890" y="0"/>
+                    <a:pt x="7493238" y="0"/>
                   </a:lnTo>
                   <a:lnTo>
-                    <a:pt x="7495890" y="0"/>
+                    <a:pt x="7493238" y="0"/>
                   </a:lnTo>
                 </a:path>
               </a:pathLst>
@@ -2857,21 +2857,21 @@
           </p:nvSpPr>
           <p:spPr>
             <a:xfrm>
-              <a:off x="1065110" y="1893467"/>
-              <a:ext cx="7495890" cy="0"/>
+              <a:off x="1067762" y="1892993"/>
+              <a:ext cx="7493238" cy="0"/>
             </a:xfrm>
             <a:custGeom>
               <a:avLst/>
               <a:pathLst>
-                <a:path w="7495890" h="0">
+                <a:path w="7493238" h="0">
                   <a:moveTo>
                     <a:pt x="0" y="0"/>
                   </a:moveTo>
                   <a:lnTo>
-                    <a:pt x="7495890" y="0"/>
+                    <a:pt x="7493238" y="0"/>
                   </a:lnTo>
                   <a:lnTo>
-                    <a:pt x="7495890" y="0"/>
+                    <a:pt x="7493238" y="0"/>
                   </a:lnTo>
                 </a:path>
               </a:pathLst>
@@ -2900,15 +2900,15 @@
           </p:nvSpPr>
           <p:spPr>
             <a:xfrm>
-              <a:off x="1383181" y="1441338"/>
-              <a:ext cx="0" cy="4538850"/>
+              <a:off x="1385721" y="1441338"/>
+              <a:ext cx="0" cy="4534095"/>
             </a:xfrm>
             <a:custGeom>
               <a:avLst/>
               <a:pathLst>
-                <a:path w="0" h="4538850">
+                <a:path w="0" h="4534095">
                   <a:moveTo>
-                    <a:pt x="0" y="4538850"/>
+                    <a:pt x="0" y="4534095"/>
                   </a:moveTo>
                   <a:lnTo>
                     <a:pt x="0" y="0"/>
@@ -2943,15 +2943,15 @@
           </p:nvSpPr>
           <p:spPr>
             <a:xfrm>
-              <a:off x="3125561" y="1441338"/>
-              <a:ext cx="0" cy="4538850"/>
+              <a:off x="3127484" y="1441338"/>
+              <a:ext cx="0" cy="4534095"/>
             </a:xfrm>
             <a:custGeom>
               <a:avLst/>
               <a:pathLst>
-                <a:path w="0" h="4538850">
+                <a:path w="0" h="4534095">
                   <a:moveTo>
-                    <a:pt x="0" y="4538850"/>
+                    <a:pt x="0" y="4534095"/>
                   </a:moveTo>
                   <a:lnTo>
                     <a:pt x="0" y="0"/>
@@ -2986,15 +2986,15 @@
           </p:nvSpPr>
           <p:spPr>
             <a:xfrm>
-              <a:off x="4867940" y="1441338"/>
-              <a:ext cx="0" cy="4538850"/>
+              <a:off x="4869247" y="1441338"/>
+              <a:ext cx="0" cy="4534095"/>
             </a:xfrm>
             <a:custGeom>
               <a:avLst/>
               <a:pathLst>
-                <a:path w="0" h="4538850">
+                <a:path w="0" h="4534095">
                   <a:moveTo>
-                    <a:pt x="0" y="4538850"/>
+                    <a:pt x="0" y="4534095"/>
                   </a:moveTo>
                   <a:lnTo>
                     <a:pt x="0" y="0"/>
@@ -3029,15 +3029,15 @@
           </p:nvSpPr>
           <p:spPr>
             <a:xfrm>
-              <a:off x="6610320" y="1441338"/>
-              <a:ext cx="0" cy="4538850"/>
+              <a:off x="6611010" y="1441338"/>
+              <a:ext cx="0" cy="4534095"/>
             </a:xfrm>
             <a:custGeom>
               <a:avLst/>
               <a:pathLst>
-                <a:path w="0" h="4538850">
+                <a:path w="0" h="4534095">
                   <a:moveTo>
-                    <a:pt x="0" y="4538850"/>
+                    <a:pt x="0" y="4534095"/>
                   </a:moveTo>
                   <a:lnTo>
                     <a:pt x="0" y="0"/>
@@ -3072,15 +3072,15 @@
           </p:nvSpPr>
           <p:spPr>
             <a:xfrm>
-              <a:off x="8352699" y="1441338"/>
-              <a:ext cx="0" cy="4538850"/>
+              <a:off x="8352773" y="1441338"/>
+              <a:ext cx="0" cy="4534095"/>
             </a:xfrm>
             <a:custGeom>
               <a:avLst/>
               <a:pathLst>
-                <a:path w="0" h="4538850">
+                <a:path w="0" h="4534095">
                   <a:moveTo>
-                    <a:pt x="0" y="4538850"/>
+                    <a:pt x="0" y="4534095"/>
                   </a:moveTo>
                   <a:lnTo>
                     <a:pt x="0" y="0"/>
@@ -3115,21 +3115,21 @@
           </p:nvSpPr>
           <p:spPr>
             <a:xfrm>
-              <a:off x="1065110" y="5844110"/>
-              <a:ext cx="7495890" cy="0"/>
+              <a:off x="1067762" y="5839498"/>
+              <a:ext cx="7493238" cy="0"/>
             </a:xfrm>
             <a:custGeom>
               <a:avLst/>
               <a:pathLst>
-                <a:path w="7495890" h="0">
+                <a:path w="7493238" h="0">
                   <a:moveTo>
                     <a:pt x="0" y="0"/>
                   </a:moveTo>
                   <a:lnTo>
-                    <a:pt x="7495890" y="0"/>
+                    <a:pt x="7493238" y="0"/>
                   </a:lnTo>
                   <a:lnTo>
-                    <a:pt x="7495890" y="0"/>
+                    <a:pt x="7493238" y="0"/>
                   </a:lnTo>
                 </a:path>
               </a:pathLst>
@@ -3158,21 +3158,21 @@
           </p:nvSpPr>
           <p:spPr>
             <a:xfrm>
-              <a:off x="1065110" y="4966190"/>
-              <a:ext cx="7495890" cy="0"/>
+              <a:off x="1067762" y="4962497"/>
+              <a:ext cx="7493238" cy="0"/>
             </a:xfrm>
             <a:custGeom>
               <a:avLst/>
               <a:pathLst>
-                <a:path w="7495890" h="0">
+                <a:path w="7493238" h="0">
                   <a:moveTo>
                     <a:pt x="0" y="0"/>
                   </a:moveTo>
                   <a:lnTo>
-                    <a:pt x="7495890" y="0"/>
+                    <a:pt x="7493238" y="0"/>
                   </a:lnTo>
                   <a:lnTo>
-                    <a:pt x="7495890" y="0"/>
+                    <a:pt x="7493238" y="0"/>
                   </a:lnTo>
                 </a:path>
               </a:pathLst>
@@ -3201,21 +3201,21 @@
           </p:nvSpPr>
           <p:spPr>
             <a:xfrm>
-              <a:off x="1065110" y="4088269"/>
-              <a:ext cx="7495890" cy="0"/>
+              <a:off x="1067762" y="4085496"/>
+              <a:ext cx="7493238" cy="0"/>
             </a:xfrm>
             <a:custGeom>
               <a:avLst/>
               <a:pathLst>
-                <a:path w="7495890" h="0">
+                <a:path w="7493238" h="0">
                   <a:moveTo>
                     <a:pt x="0" y="0"/>
                   </a:moveTo>
                   <a:lnTo>
-                    <a:pt x="7495890" y="0"/>
+                    <a:pt x="7493238" y="0"/>
                   </a:lnTo>
                   <a:lnTo>
-                    <a:pt x="7495890" y="0"/>
+                    <a:pt x="7493238" y="0"/>
                   </a:lnTo>
                 </a:path>
               </a:pathLst>
@@ -3244,21 +3244,21 @@
           </p:nvSpPr>
           <p:spPr>
             <a:xfrm>
-              <a:off x="1065110" y="3210348"/>
-              <a:ext cx="7495890" cy="0"/>
+              <a:off x="1067762" y="3208495"/>
+              <a:ext cx="7493238" cy="0"/>
             </a:xfrm>
             <a:custGeom>
               <a:avLst/>
               <a:pathLst>
-                <a:path w="7495890" h="0">
+                <a:path w="7493238" h="0">
                   <a:moveTo>
                     <a:pt x="0" y="0"/>
                   </a:moveTo>
                   <a:lnTo>
-                    <a:pt x="7495890" y="0"/>
+                    <a:pt x="7493238" y="0"/>
                   </a:lnTo>
                   <a:lnTo>
-                    <a:pt x="7495890" y="0"/>
+                    <a:pt x="7493238" y="0"/>
                   </a:lnTo>
                 </a:path>
               </a:pathLst>
@@ -3287,21 +3287,21 @@
           </p:nvSpPr>
           <p:spPr>
             <a:xfrm>
-              <a:off x="1065110" y="2332427"/>
-              <a:ext cx="7495890" cy="0"/>
+              <a:off x="1067762" y="2331494"/>
+              <a:ext cx="7493238" cy="0"/>
             </a:xfrm>
             <a:custGeom>
               <a:avLst/>
               <a:pathLst>
-                <a:path w="7495890" h="0">
+                <a:path w="7493238" h="0">
                   <a:moveTo>
                     <a:pt x="0" y="0"/>
                   </a:moveTo>
                   <a:lnTo>
-                    <a:pt x="7495890" y="0"/>
+                    <a:pt x="7493238" y="0"/>
                   </a:lnTo>
                   <a:lnTo>
-                    <a:pt x="7495890" y="0"/>
+                    <a:pt x="7493238" y="0"/>
                   </a:lnTo>
                 </a:path>
               </a:pathLst>
@@ -3330,21 +3330,21 @@
           </p:nvSpPr>
           <p:spPr>
             <a:xfrm>
-              <a:off x="1065110" y="1454506"/>
-              <a:ext cx="7495890" cy="0"/>
+              <a:off x="1067762" y="1454493"/>
+              <a:ext cx="7493238" cy="0"/>
             </a:xfrm>
             <a:custGeom>
               <a:avLst/>
               <a:pathLst>
-                <a:path w="7495890" h="0">
+                <a:path w="7493238" h="0">
                   <a:moveTo>
                     <a:pt x="0" y="0"/>
                   </a:moveTo>
                   <a:lnTo>
-                    <a:pt x="7495890" y="0"/>
+                    <a:pt x="7493238" y="0"/>
                   </a:lnTo>
                   <a:lnTo>
-                    <a:pt x="7495890" y="0"/>
+                    <a:pt x="7493238" y="0"/>
                   </a:lnTo>
                 </a:path>
               </a:pathLst>
@@ -3373,15 +3373,15 @@
           </p:nvSpPr>
           <p:spPr>
             <a:xfrm>
-              <a:off x="2254371" y="1441338"/>
-              <a:ext cx="0" cy="4538850"/>
+              <a:off x="2256602" y="1441338"/>
+              <a:ext cx="0" cy="4534095"/>
             </a:xfrm>
             <a:custGeom>
               <a:avLst/>
               <a:pathLst>
-                <a:path w="0" h="4538850">
+                <a:path w="0" h="4534095">
                   <a:moveTo>
-                    <a:pt x="0" y="4538850"/>
+                    <a:pt x="0" y="4534095"/>
                   </a:moveTo>
                   <a:lnTo>
                     <a:pt x="0" y="0"/>
@@ -3416,15 +3416,15 @@
           </p:nvSpPr>
           <p:spPr>
             <a:xfrm>
-              <a:off x="3996750" y="1441338"/>
-              <a:ext cx="0" cy="4538850"/>
+              <a:off x="3998365" y="1441338"/>
+              <a:ext cx="0" cy="4534095"/>
             </a:xfrm>
             <a:custGeom>
               <a:avLst/>
               <a:pathLst>
-                <a:path w="0" h="4538850">
+                <a:path w="0" h="4534095">
                   <a:moveTo>
-                    <a:pt x="0" y="4538850"/>
+                    <a:pt x="0" y="4534095"/>
                   </a:moveTo>
                   <a:lnTo>
                     <a:pt x="0" y="0"/>
@@ -3459,15 +3459,15 @@
           </p:nvSpPr>
           <p:spPr>
             <a:xfrm>
-              <a:off x="5739130" y="1441338"/>
-              <a:ext cx="0" cy="4538850"/>
+              <a:off x="5740128" y="1441338"/>
+              <a:ext cx="0" cy="4534095"/>
             </a:xfrm>
             <a:custGeom>
               <a:avLst/>
               <a:pathLst>
-                <a:path w="0" h="4538850">
+                <a:path w="0" h="4534095">
                   <a:moveTo>
-                    <a:pt x="0" y="4538850"/>
+                    <a:pt x="0" y="4534095"/>
                   </a:moveTo>
                   <a:lnTo>
                     <a:pt x="0" y="0"/>
@@ -3502,15 +3502,15 @@
           </p:nvSpPr>
           <p:spPr>
             <a:xfrm>
-              <a:off x="7481509" y="1441338"/>
-              <a:ext cx="0" cy="4538850"/>
+              <a:off x="7481891" y="1441338"/>
+              <a:ext cx="0" cy="4534095"/>
             </a:xfrm>
             <a:custGeom>
               <a:avLst/>
               <a:pathLst>
-                <a:path w="0" h="4538850">
+                <a:path w="0" h="4534095">
                   <a:moveTo>
-                    <a:pt x="0" y="4538850"/>
+                    <a:pt x="0" y="4534095"/>
                   </a:moveTo>
                   <a:lnTo>
                     <a:pt x="0" y="0"/>
@@ -3545,7 +3545,7 @@
           </p:nvSpPr>
           <p:spPr>
             <a:xfrm>
-              <a:off x="3301571" y="3879610"/>
+              <a:off x="3303420" y="3877021"/>
               <a:ext cx="66150" cy="66150"/>
             </a:xfrm>
             <a:prstGeom prst="ellipse">
@@ -3580,7 +3580,7 @@
           </p:nvSpPr>
           <p:spPr>
             <a:xfrm>
-              <a:off x="3745878" y="3879610"/>
+              <a:off x="3747570" y="3877021"/>
               <a:ext cx="66150" cy="66150"/>
             </a:xfrm>
             <a:prstGeom prst="ellipse">
@@ -3615,7 +3615,7 @@
           </p:nvSpPr>
           <p:spPr>
             <a:xfrm>
-              <a:off x="2778857" y="3563558"/>
+              <a:off x="2780891" y="3561300"/>
               <a:ext cx="66150" cy="66150"/>
             </a:xfrm>
             <a:prstGeom prst="ellipse">
@@ -3650,7 +3650,7 @@
           </p:nvSpPr>
           <p:spPr>
             <a:xfrm>
-              <a:off x="4338287" y="3809376"/>
+              <a:off x="4339769" y="3806861"/>
               <a:ext cx="66150" cy="66150"/>
             </a:xfrm>
             <a:prstGeom prst="ellipse">
@@ -3685,7 +3685,7 @@
           </p:nvSpPr>
           <p:spPr>
             <a:xfrm>
-              <a:off x="4730322" y="4283453"/>
+              <a:off x="4731666" y="4280441"/>
               <a:ext cx="66150" cy="66150"/>
             </a:xfrm>
             <a:prstGeom prst="ellipse">
@@ -3720,7 +3720,7 @@
           </p:nvSpPr>
           <p:spPr>
             <a:xfrm>
-              <a:off x="4765170" y="4388804"/>
+              <a:off x="4766501" y="4385681"/>
               <a:ext cx="66150" cy="66150"/>
             </a:xfrm>
             <a:prstGeom prst="ellipse">
@@ -3755,7 +3755,7 @@
           </p:nvSpPr>
           <p:spPr>
             <a:xfrm>
-              <a:off x="4956832" y="5056024"/>
+              <a:off x="4958095" y="5052202"/>
               <a:ext cx="66150" cy="66150"/>
             </a:xfrm>
             <a:prstGeom prst="ellipse">
@@ -3790,7 +3790,7 @@
           </p:nvSpPr>
           <p:spPr>
             <a:xfrm>
-              <a:off x="4294728" y="3282623"/>
+              <a:off x="4296225" y="3280660"/>
               <a:ext cx="66150" cy="66150"/>
             </a:xfrm>
             <a:prstGeom prst="ellipse">
@@ -3825,7 +3825,7 @@
           </p:nvSpPr>
           <p:spPr>
             <a:xfrm>
-              <a:off x="4225032" y="3563558"/>
+              <a:off x="4226555" y="3561300"/>
               <a:ext cx="66150" cy="66150"/>
             </a:xfrm>
             <a:prstGeom prst="ellipse">
@@ -3860,7 +3860,7 @@
           </p:nvSpPr>
           <p:spPr>
             <a:xfrm>
-              <a:off x="4730322" y="4195661"/>
+              <a:off x="4731666" y="4192741"/>
               <a:ext cx="66150" cy="66150"/>
             </a:xfrm>
             <a:prstGeom prst="ellipse">
@@ -3895,7 +3895,7 @@
           </p:nvSpPr>
           <p:spPr>
             <a:xfrm>
-              <a:off x="4730322" y="4441479"/>
+              <a:off x="4731666" y="4438301"/>
               <a:ext cx="66150" cy="66150"/>
             </a:xfrm>
             <a:prstGeom prst="ellipse">
@@ -3930,7 +3930,7 @@
           </p:nvSpPr>
           <p:spPr>
             <a:xfrm>
-              <a:off x="5828021" y="4687297"/>
+              <a:off x="5828977" y="4683862"/>
               <a:ext cx="66150" cy="66150"/>
             </a:xfrm>
             <a:prstGeom prst="ellipse">
@@ -3965,7 +3965,7 @@
           </p:nvSpPr>
           <p:spPr>
             <a:xfrm>
-              <a:off x="5235612" y="4529271"/>
+              <a:off x="5236777" y="4526001"/>
               <a:ext cx="66150" cy="66150"/>
             </a:xfrm>
             <a:prstGeom prst="ellipse">
@@ -4000,7 +4000,7 @@
           </p:nvSpPr>
           <p:spPr>
             <a:xfrm>
-              <a:off x="5322731" y="4897998"/>
+              <a:off x="5323865" y="4894342"/>
               <a:ext cx="66150" cy="66150"/>
             </a:xfrm>
             <a:prstGeom prst="ellipse">
@@ -4035,7 +4035,7 @@
           </p:nvSpPr>
           <p:spPr>
             <a:xfrm>
-              <a:off x="7884029" y="5740802"/>
+              <a:off x="7884257" y="5736263"/>
               <a:ext cx="66150" cy="66150"/>
             </a:xfrm>
             <a:prstGeom prst="ellipse">
@@ -4070,7 +4070,7 @@
           </p:nvSpPr>
           <p:spPr>
             <a:xfrm>
-              <a:off x="8187203" y="5740802"/>
+              <a:off x="8187324" y="5736263"/>
               <a:ext cx="66150" cy="66150"/>
             </a:xfrm>
             <a:prstGeom prst="ellipse">
@@ -4105,7 +4105,7 @@
           </p:nvSpPr>
           <p:spPr>
             <a:xfrm>
-              <a:off x="8049555" y="4985790"/>
+              <a:off x="8049724" y="4982042"/>
               <a:ext cx="66150" cy="66150"/>
             </a:xfrm>
             <a:prstGeom prst="ellipse">
@@ -4140,7 +4140,7 @@
           </p:nvSpPr>
           <p:spPr>
             <a:xfrm>
-              <a:off x="2569772" y="1877950"/>
+              <a:off x="2571880" y="1877458"/>
               <a:ext cx="66150" cy="66150"/>
             </a:xfrm>
             <a:prstGeom prst="ellipse">
@@ -4175,7 +4175,7 @@
           </p:nvSpPr>
           <p:spPr>
             <a:xfrm>
-              <a:off x="1550480" y="2229119"/>
+              <a:off x="1552948" y="2228259"/>
               <a:ext cx="66150" cy="66150"/>
             </a:xfrm>
             <a:prstGeom prst="ellipse">
@@ -4210,7 +4210,7 @@
           </p:nvSpPr>
           <p:spPr>
             <a:xfrm>
-              <a:off x="1933803" y="1614574"/>
+              <a:off x="1936136" y="1614358"/>
               <a:ext cx="66150" cy="66150"/>
             </a:xfrm>
             <a:prstGeom prst="ellipse">
@@ -4245,7 +4245,7 @@
           </p:nvSpPr>
           <p:spPr>
             <a:xfrm>
-              <a:off x="3031502" y="3791818"/>
+              <a:off x="3033447" y="3789321"/>
               <a:ext cx="66150" cy="66150"/>
             </a:xfrm>
             <a:prstGeom prst="ellipse">
@@ -4280,7 +4280,7 @@
           </p:nvSpPr>
           <p:spPr>
             <a:xfrm>
-              <a:off x="4869713" y="4845323"/>
+              <a:off x="4871007" y="4841722"/>
               <a:ext cx="66150" cy="66150"/>
             </a:xfrm>
             <a:prstGeom prst="ellipse">
@@ -4315,7 +4315,7 @@
           </p:nvSpPr>
           <p:spPr>
             <a:xfrm>
-              <a:off x="4721610" y="4897998"/>
+              <a:off x="4722957" y="4894342"/>
               <a:ext cx="66150" cy="66150"/>
             </a:xfrm>
             <a:prstGeom prst="ellipse">
@@ -4350,7 +4350,7 @@
           </p:nvSpPr>
           <p:spPr>
             <a:xfrm>
-              <a:off x="5427274" y="5231608"/>
+              <a:off x="5428371" y="5227602"/>
               <a:ext cx="66150" cy="66150"/>
             </a:xfrm>
             <a:prstGeom prst="ellipse">
@@ -4385,7 +4385,7 @@
           </p:nvSpPr>
           <p:spPr>
             <a:xfrm>
-              <a:off x="5435986" y="4195661"/>
+              <a:off x="5437080" y="4192741"/>
               <a:ext cx="66150" cy="66150"/>
             </a:xfrm>
             <a:prstGeom prst="ellipse">
@@ -4420,7 +4420,7 @@
           </p:nvSpPr>
           <p:spPr>
             <a:xfrm>
-              <a:off x="2108041" y="2773429"/>
+              <a:off x="2110312" y="2771999"/>
               <a:ext cx="66150" cy="66150"/>
             </a:xfrm>
             <a:prstGeom prst="ellipse">
@@ -4455,7 +4455,7 @@
           </p:nvSpPr>
           <p:spPr>
             <a:xfrm>
-              <a:off x="2465229" y="3001689"/>
+              <a:off x="2467374" y="3000020"/>
               <a:ext cx="66150" cy="66150"/>
             </a:xfrm>
             <a:prstGeom prst="ellipse">
@@ -4490,7 +4490,7 @@
           </p:nvSpPr>
           <p:spPr>
             <a:xfrm>
-              <a:off x="1372757" y="2229119"/>
+              <a:off x="1375288" y="2228259"/>
               <a:ext cx="66150" cy="66150"/>
             </a:xfrm>
             <a:prstGeom prst="ellipse">
@@ -4525,7 +4525,7 @@
           </p:nvSpPr>
           <p:spPr>
             <a:xfrm>
-              <a:off x="4259880" y="4792647"/>
+              <a:off x="4261390" y="4789102"/>
               <a:ext cx="66150" cy="66150"/>
             </a:xfrm>
             <a:prstGeom prst="ellipse">
@@ -4560,7 +4560,7 @@
           </p:nvSpPr>
           <p:spPr>
             <a:xfrm>
-              <a:off x="3562928" y="4107869"/>
+              <a:off x="3564685" y="4105041"/>
               <a:ext cx="66150" cy="66150"/>
             </a:xfrm>
             <a:prstGeom prst="ellipse">
@@ -4595,7 +4595,7 @@
           </p:nvSpPr>
           <p:spPr>
             <a:xfrm>
-              <a:off x="4956832" y="4933115"/>
+              <a:off x="4958095" y="4929422"/>
               <a:ext cx="66150" cy="66150"/>
             </a:xfrm>
             <a:prstGeom prst="ellipse">
@@ -4630,7 +4630,7 @@
           </p:nvSpPr>
           <p:spPr>
             <a:xfrm>
-              <a:off x="3580352" y="3809376"/>
+              <a:off x="3582102" y="3806861"/>
               <a:ext cx="66150" cy="66150"/>
             </a:xfrm>
             <a:prstGeom prst="ellipse">
@@ -4665,7 +4665,7 @@
           </p:nvSpPr>
           <p:spPr>
             <a:xfrm>
-              <a:off x="872818" y="5804563"/>
+              <a:off x="875470" y="5799950"/>
               <a:ext cx="129661" cy="79095"/>
             </a:xfrm>
             <a:prstGeom prst="rect">
@@ -4711,7 +4711,7 @@
           </p:nvSpPr>
           <p:spPr>
             <a:xfrm>
-              <a:off x="872818" y="4926642"/>
+              <a:off x="875470" y="4922949"/>
               <a:ext cx="129661" cy="79095"/>
             </a:xfrm>
             <a:prstGeom prst="rect">
@@ -4757,7 +4757,7 @@
           </p:nvSpPr>
           <p:spPr>
             <a:xfrm>
-              <a:off x="872818" y="4048721"/>
+              <a:off x="875470" y="4045948"/>
               <a:ext cx="129661" cy="79095"/>
             </a:xfrm>
             <a:prstGeom prst="rect">
@@ -4803,7 +4803,7 @@
           </p:nvSpPr>
           <p:spPr>
             <a:xfrm>
-              <a:off x="872818" y="3170800"/>
+              <a:off x="875470" y="3168947"/>
               <a:ext cx="129661" cy="79095"/>
             </a:xfrm>
             <a:prstGeom prst="rect">
@@ -4849,7 +4849,7 @@
           </p:nvSpPr>
           <p:spPr>
             <a:xfrm>
-              <a:off x="872818" y="2292879"/>
+              <a:off x="875470" y="2291946"/>
               <a:ext cx="129661" cy="79095"/>
             </a:xfrm>
             <a:prstGeom prst="rect">
@@ -4895,7 +4895,7 @@
           </p:nvSpPr>
           <p:spPr>
             <a:xfrm>
-              <a:off x="872818" y="1414959"/>
+              <a:off x="875470" y="1414945"/>
               <a:ext cx="129661" cy="79095"/>
             </a:xfrm>
             <a:prstGeom prst="rect">
@@ -4941,7 +4941,7 @@
           </p:nvSpPr>
           <p:spPr>
             <a:xfrm>
-              <a:off x="1030315" y="5844110"/>
+              <a:off x="1032967" y="5839498"/>
               <a:ext cx="34794" cy="0"/>
             </a:xfrm>
             <a:custGeom>
@@ -4981,7 +4981,7 @@
           </p:nvSpPr>
           <p:spPr>
             <a:xfrm>
-              <a:off x="1030315" y="4966190"/>
+              <a:off x="1032967" y="4962497"/>
               <a:ext cx="34794" cy="0"/>
             </a:xfrm>
             <a:custGeom>
@@ -5021,7 +5021,7 @@
           </p:nvSpPr>
           <p:spPr>
             <a:xfrm>
-              <a:off x="1030315" y="4088269"/>
+              <a:off x="1032967" y="4085496"/>
               <a:ext cx="34794" cy="0"/>
             </a:xfrm>
             <a:custGeom>
@@ -5061,7 +5061,7 @@
           </p:nvSpPr>
           <p:spPr>
             <a:xfrm>
-              <a:off x="1030315" y="3210348"/>
+              <a:off x="1032967" y="3208495"/>
               <a:ext cx="34794" cy="0"/>
             </a:xfrm>
             <a:custGeom>
@@ -5101,7 +5101,7 @@
           </p:nvSpPr>
           <p:spPr>
             <a:xfrm>
-              <a:off x="1030315" y="2332427"/>
+              <a:off x="1032967" y="2331494"/>
               <a:ext cx="34794" cy="0"/>
             </a:xfrm>
             <a:custGeom>
@@ -5141,7 +5141,7 @@
           </p:nvSpPr>
           <p:spPr>
             <a:xfrm>
-              <a:off x="1030315" y="1454506"/>
+              <a:off x="1032967" y="1454493"/>
               <a:ext cx="34794" cy="0"/>
             </a:xfrm>
             <a:custGeom>
@@ -5181,7 +5181,7 @@
           </p:nvSpPr>
           <p:spPr>
             <a:xfrm>
-              <a:off x="2254371" y="5980188"/>
+              <a:off x="2256602" y="5975433"/>
               <a:ext cx="0" cy="34794"/>
             </a:xfrm>
             <a:custGeom>
@@ -5221,7 +5221,7 @@
           </p:nvSpPr>
           <p:spPr>
             <a:xfrm>
-              <a:off x="3996750" y="5980188"/>
+              <a:off x="3998365" y="5975433"/>
               <a:ext cx="0" cy="34794"/>
             </a:xfrm>
             <a:custGeom>
@@ -5261,7 +5261,7 @@
           </p:nvSpPr>
           <p:spPr>
             <a:xfrm>
-              <a:off x="5739130" y="5980188"/>
+              <a:off x="5740128" y="5975433"/>
               <a:ext cx="0" cy="34794"/>
             </a:xfrm>
             <a:custGeom>
@@ -5301,7 +5301,7 @@
           </p:nvSpPr>
           <p:spPr>
             <a:xfrm>
-              <a:off x="7481509" y="5980188"/>
+              <a:off x="7481891" y="5975433"/>
               <a:ext cx="0" cy="34794"/>
             </a:xfrm>
             <a:custGeom>
@@ -5341,7 +5341,7 @@
           </p:nvSpPr>
           <p:spPr>
             <a:xfrm>
-              <a:off x="2221956" y="6042818"/>
+              <a:off x="2224187" y="6038063"/>
               <a:ext cx="64830" cy="79095"/>
             </a:xfrm>
             <a:prstGeom prst="rect">
@@ -5387,7 +5387,7 @@
           </p:nvSpPr>
           <p:spPr>
             <a:xfrm>
-              <a:off x="3964335" y="6042818"/>
+              <a:off x="3965950" y="6038063"/>
               <a:ext cx="64830" cy="79095"/>
             </a:xfrm>
             <a:prstGeom prst="rect">
@@ -5433,7 +5433,7 @@
           </p:nvSpPr>
           <p:spPr>
             <a:xfrm>
-              <a:off x="5706714" y="6042818"/>
+              <a:off x="5707713" y="6038063"/>
               <a:ext cx="64830" cy="79095"/>
             </a:xfrm>
             <a:prstGeom prst="rect">
@@ -5479,7 +5479,7 @@
           </p:nvSpPr>
           <p:spPr>
             <a:xfrm>
-              <a:off x="7449094" y="6042818"/>
+              <a:off x="7449476" y="6038063"/>
               <a:ext cx="64830" cy="79095"/>
             </a:xfrm>
             <a:prstGeom prst="rect">
@@ -5525,7 +5525,7 @@
           </p:nvSpPr>
           <p:spPr>
             <a:xfrm>
-              <a:off x="4738806" y="6181489"/>
+              <a:off x="4740132" y="6178837"/>
               <a:ext cx="148498" cy="98938"/>
             </a:xfrm>
             <a:prstGeom prst="rect">
@@ -5571,7 +5571,7 @@
           </p:nvSpPr>
           <p:spPr>
             <a:xfrm rot="-5400000">
-              <a:off x="607457" y="3661294"/>
+              <a:off x="607457" y="3658916"/>
               <a:ext cx="300380" cy="98938"/>
             </a:xfrm>
             <a:prstGeom prst="rect">
@@ -5766,7 +5766,7 @@
           <p:spPr>
             <a:xfrm>
               <a:off x="848922" y="1463189"/>
-              <a:ext cx="7671939" cy="4284827"/>
+              <a:ext cx="7671939" cy="4276232"/>
             </a:xfrm>
             <a:prstGeom prst="rect">
               <a:avLst/>
@@ -5791,7 +5791,7 @@
           </p:nvSpPr>
           <p:spPr>
             <a:xfrm>
-              <a:off x="848922" y="5068206"/>
+              <a:off x="848922" y="5060975"/>
               <a:ext cx="7671939" cy="0"/>
             </a:xfrm>
             <a:custGeom>
@@ -5834,7 +5834,7 @@
           </p:nvSpPr>
           <p:spPr>
             <a:xfrm>
-              <a:off x="848922" y="4072221"/>
+              <a:off x="848922" y="4066988"/>
               <a:ext cx="7671939" cy="0"/>
             </a:xfrm>
             <a:custGeom>
@@ -5877,7 +5877,7 @@
           </p:nvSpPr>
           <p:spPr>
             <a:xfrm>
-              <a:off x="848922" y="3076236"/>
+              <a:off x="848922" y="3073000"/>
               <a:ext cx="7671939" cy="0"/>
             </a:xfrm>
             <a:custGeom>
@@ -5920,7 +5920,7 @@
           </p:nvSpPr>
           <p:spPr>
             <a:xfrm>
-              <a:off x="848922" y="2080251"/>
+              <a:off x="848922" y="2079013"/>
               <a:ext cx="7671939" cy="0"/>
             </a:xfrm>
             <a:custGeom>
@@ -5963,7 +5963,7 @@
           </p:nvSpPr>
           <p:spPr>
             <a:xfrm>
-              <a:off x="4310512" y="4417621"/>
+              <a:off x="4310512" y="4411628"/>
               <a:ext cx="66150" cy="66150"/>
             </a:xfrm>
             <a:prstGeom prst="ellipse">
@@ -5998,7 +5998,7 @@
           </p:nvSpPr>
           <p:spPr>
             <a:xfrm>
-              <a:off x="4310512" y="4163644"/>
+              <a:off x="4310512" y="4158161"/>
               <a:ext cx="66150" cy="66150"/>
             </a:xfrm>
             <a:prstGeom prst="ellipse">
@@ -6033,7 +6033,7 @@
           </p:nvSpPr>
           <p:spPr>
             <a:xfrm>
-              <a:off x="4844728" y="4716416"/>
+              <a:off x="4844728" y="4709824"/>
               <a:ext cx="66150" cy="66150"/>
             </a:xfrm>
             <a:prstGeom prst="ellipse">
@@ -6068,7 +6068,7 @@
           </p:nvSpPr>
           <p:spPr>
             <a:xfrm>
-              <a:off x="4429226" y="3825009"/>
+              <a:off x="4429226" y="3820205"/>
               <a:ext cx="66150" cy="66150"/>
             </a:xfrm>
             <a:prstGeom prst="ellipse">
@@ -6103,7 +6103,7 @@
           </p:nvSpPr>
           <p:spPr>
             <a:xfrm>
-              <a:off x="3627902" y="3600913"/>
+              <a:off x="3627902" y="3596558"/>
               <a:ext cx="66150" cy="66150"/>
             </a:xfrm>
             <a:prstGeom prst="ellipse">
@@ -6138,7 +6138,7 @@
           </p:nvSpPr>
           <p:spPr>
             <a:xfrm>
-              <a:off x="3449830" y="3580993"/>
+              <a:off x="3449830" y="3576678"/>
               <a:ext cx="66150" cy="66150"/>
             </a:xfrm>
             <a:prstGeom prst="ellipse">
@@ -6173,7 +6173,7 @@
           </p:nvSpPr>
           <p:spPr>
             <a:xfrm>
-              <a:off x="2322040" y="3471435"/>
+              <a:off x="2322040" y="3467340"/>
               <a:ext cx="66150" cy="66150"/>
             </a:xfrm>
             <a:prstGeom prst="ellipse">
@@ -6208,7 +6208,7 @@
           </p:nvSpPr>
           <p:spPr>
             <a:xfrm>
-              <a:off x="5319587" y="3849909"/>
+              <a:off x="5319587" y="3845055"/>
               <a:ext cx="66150" cy="66150"/>
             </a:xfrm>
             <a:prstGeom prst="ellipse">
@@ -6243,7 +6243,7 @@
           </p:nvSpPr>
           <p:spPr>
             <a:xfrm>
-              <a:off x="4844728" y="3889748"/>
+              <a:off x="4844728" y="3884814"/>
               <a:ext cx="66150" cy="66150"/>
             </a:xfrm>
             <a:prstGeom prst="ellipse">
@@ -6278,7 +6278,7 @@
           </p:nvSpPr>
           <p:spPr>
             <a:xfrm>
-              <a:off x="3776295" y="3600913"/>
+              <a:off x="3776295" y="3596558"/>
               <a:ext cx="66150" cy="66150"/>
             </a:xfrm>
             <a:prstGeom prst="ellipse">
@@ -6313,7 +6313,7 @@
           </p:nvSpPr>
           <p:spPr>
             <a:xfrm>
-              <a:off x="3360794" y="3600913"/>
+              <a:off x="3360794" y="3596558"/>
               <a:ext cx="66150" cy="66150"/>
             </a:xfrm>
             <a:prstGeom prst="ellipse">
@@ -6348,7 +6348,7 @@
           </p:nvSpPr>
           <p:spPr>
             <a:xfrm>
-              <a:off x="2945292" y="2973442"/>
+              <a:off x="2945292" y="2970346"/>
               <a:ext cx="66150" cy="66150"/>
             </a:xfrm>
             <a:prstGeom prst="ellipse">
@@ -6383,7 +6383,7 @@
           </p:nvSpPr>
           <p:spPr>
             <a:xfrm>
-              <a:off x="3212400" y="3312077"/>
+              <a:off x="3212400" y="3308302"/>
               <a:ext cx="66150" cy="66150"/>
             </a:xfrm>
             <a:prstGeom prst="ellipse">
@@ -6418,7 +6418,7 @@
           </p:nvSpPr>
           <p:spPr>
             <a:xfrm>
-              <a:off x="2589148" y="3262278"/>
+              <a:off x="2589148" y="3258603"/>
               <a:ext cx="66150" cy="66150"/>
             </a:xfrm>
             <a:prstGeom prst="ellipse">
@@ -6453,7 +6453,7 @@
           </p:nvSpPr>
           <p:spPr>
             <a:xfrm>
-              <a:off x="1164571" y="1798180"/>
+              <a:off x="1164571" y="1797441"/>
               <a:ext cx="66150" cy="66150"/>
             </a:xfrm>
             <a:prstGeom prst="ellipse">
@@ -6488,7 +6488,7 @@
           </p:nvSpPr>
           <p:spPr>
             <a:xfrm>
-              <a:off x="1164571" y="1624878"/>
+              <a:off x="1164571" y="1624488"/>
               <a:ext cx="66150" cy="66150"/>
             </a:xfrm>
             <a:prstGeom prst="ellipse">
@@ -6523,7 +6523,7 @@
           </p:nvSpPr>
           <p:spPr>
             <a:xfrm>
-              <a:off x="2440755" y="1703561"/>
+              <a:off x="2440755" y="1703013"/>
               <a:ext cx="66150" cy="66150"/>
             </a:xfrm>
             <a:prstGeom prst="ellipse">
@@ -6558,7 +6558,7 @@
           </p:nvSpPr>
           <p:spPr>
             <a:xfrm>
-              <a:off x="7693882" y="4835934"/>
+              <a:off x="7693882" y="4829102"/>
               <a:ext cx="66150" cy="66150"/>
             </a:xfrm>
             <a:prstGeom prst="ellipse">
@@ -6593,7 +6593,7 @@
           </p:nvSpPr>
           <p:spPr>
             <a:xfrm>
-              <a:off x="7100308" y="5418586"/>
+              <a:off x="7100308" y="5410585"/>
               <a:ext cx="66150" cy="66150"/>
             </a:xfrm>
             <a:prstGeom prst="ellipse">
@@ -6628,7 +6628,7 @@
           </p:nvSpPr>
           <p:spPr>
             <a:xfrm>
-              <a:off x="8139062" y="5199469"/>
+              <a:off x="8139062" y="5191908"/>
               <a:ext cx="66150" cy="66150"/>
             </a:xfrm>
             <a:prstGeom prst="ellipse">
@@ -6663,7 +6663,7 @@
           </p:nvSpPr>
           <p:spPr>
             <a:xfrm>
-              <a:off x="4458905" y="4571998"/>
+              <a:off x="4458905" y="4565696"/>
               <a:ext cx="66150" cy="66150"/>
             </a:xfrm>
             <a:prstGeom prst="ellipse">
@@ -6698,7 +6698,7 @@
           </p:nvSpPr>
           <p:spPr>
             <a:xfrm>
-              <a:off x="2678184" y="3521234"/>
+              <a:off x="2678184" y="3517039"/>
               <a:ext cx="66150" cy="66150"/>
             </a:xfrm>
             <a:prstGeom prst="ellipse">
@@ -6733,7 +6733,7 @@
           </p:nvSpPr>
           <p:spPr>
             <a:xfrm>
-              <a:off x="2589148" y="3605893"/>
+              <a:off x="2589148" y="3601528"/>
               <a:ext cx="66150" cy="66150"/>
             </a:xfrm>
             <a:prstGeom prst="ellipse">
@@ -6768,7 +6768,7 @@
           </p:nvSpPr>
           <p:spPr>
             <a:xfrm>
-              <a:off x="2025253" y="3202519"/>
+              <a:off x="2025253" y="3198963"/>
               <a:ext cx="66150" cy="66150"/>
             </a:xfrm>
             <a:prstGeom prst="ellipse">
@@ -6803,7 +6803,7 @@
           </p:nvSpPr>
           <p:spPr>
             <a:xfrm>
-              <a:off x="3776295" y="3197539"/>
+              <a:off x="3776295" y="3193993"/>
               <a:ext cx="66150" cy="66150"/>
             </a:xfrm>
             <a:prstGeom prst="ellipse">
@@ -6838,7 +6838,7 @@
           </p:nvSpPr>
           <p:spPr>
             <a:xfrm>
-              <a:off x="6180269" y="5099870"/>
+              <a:off x="6180269" y="5092509"/>
               <a:ext cx="66150" cy="66150"/>
             </a:xfrm>
             <a:prstGeom prst="ellipse">
@@ -6873,7 +6873,7 @@
           </p:nvSpPr>
           <p:spPr>
             <a:xfrm>
-              <a:off x="5794446" y="4895693"/>
+              <a:off x="5794446" y="4888741"/>
               <a:ext cx="66150" cy="66150"/>
             </a:xfrm>
             <a:prstGeom prst="ellipse">
@@ -6908,7 +6908,7 @@
           </p:nvSpPr>
           <p:spPr>
             <a:xfrm>
-              <a:off x="7100308" y="5520176"/>
+              <a:off x="7100308" y="5511971"/>
               <a:ext cx="66150" cy="66150"/>
             </a:xfrm>
             <a:prstGeom prst="ellipse">
@@ -6943,7 +6943,7 @@
           </p:nvSpPr>
           <p:spPr>
             <a:xfrm>
-              <a:off x="2767220" y="3869829"/>
+              <a:off x="2767220" y="3864935"/>
               <a:ext cx="66150" cy="66150"/>
             </a:xfrm>
             <a:prstGeom prst="ellipse">
@@ -6978,7 +6978,7 @@
           </p:nvSpPr>
           <p:spPr>
             <a:xfrm>
-              <a:off x="3924689" y="4268223"/>
+              <a:off x="3924689" y="4262530"/>
               <a:ext cx="66150" cy="66150"/>
             </a:xfrm>
             <a:prstGeom prst="ellipse">
@@ -7013,7 +7013,7 @@
           </p:nvSpPr>
           <p:spPr>
             <a:xfrm>
-              <a:off x="2529791" y="3471435"/>
+              <a:off x="2529791" y="3467340"/>
               <a:ext cx="66150" cy="66150"/>
             </a:xfrm>
             <a:prstGeom prst="ellipse">
@@ -7048,7 +7048,7 @@
           </p:nvSpPr>
           <p:spPr>
             <a:xfrm>
-              <a:off x="4429226" y="4258263"/>
+              <a:off x="4429226" y="4252590"/>
               <a:ext cx="66150" cy="66150"/>
             </a:xfrm>
             <a:prstGeom prst="ellipse">
@@ -7083,7 +7083,7 @@
           </p:nvSpPr>
           <p:spPr>
             <a:xfrm>
-              <a:off x="640418" y="4987282"/>
+              <a:off x="640418" y="4980050"/>
               <a:ext cx="132588" cy="161848"/>
             </a:xfrm>
             <a:prstGeom prst="rect">
@@ -7129,7 +7129,7 @@
           </p:nvSpPr>
           <p:spPr>
             <a:xfrm>
-              <a:off x="640418" y="3991297"/>
+              <a:off x="640418" y="3986063"/>
               <a:ext cx="132588" cy="161848"/>
             </a:xfrm>
             <a:prstGeom prst="rect">
@@ -7175,7 +7175,7 @@
           </p:nvSpPr>
           <p:spPr>
             <a:xfrm>
-              <a:off x="640418" y="2995312"/>
+              <a:off x="640418" y="2992076"/>
               <a:ext cx="132588" cy="161848"/>
             </a:xfrm>
             <a:prstGeom prst="rect">
@@ -7221,7 +7221,7 @@
           </p:nvSpPr>
           <p:spPr>
             <a:xfrm>
-              <a:off x="640418" y="1999327"/>
+              <a:off x="640418" y="1998089"/>
               <a:ext cx="132588" cy="161848"/>
             </a:xfrm>
             <a:prstGeom prst="rect">
@@ -7267,7 +7267,7 @@
           </p:nvSpPr>
           <p:spPr>
             <a:xfrm>
-              <a:off x="848922" y="5748016"/>
+              <a:off x="848922" y="5739421"/>
               <a:ext cx="7671939" cy="0"/>
             </a:xfrm>
             <a:custGeom>
@@ -7307,7 +7307,7 @@
           </p:nvSpPr>
           <p:spPr>
             <a:xfrm>
-              <a:off x="1078931" y="5748016"/>
+              <a:off x="1078931" y="5739421"/>
               <a:ext cx="0" cy="56936"/>
             </a:xfrm>
             <a:custGeom>
@@ -7347,7 +7347,7 @@
           </p:nvSpPr>
           <p:spPr>
             <a:xfrm>
-              <a:off x="2562866" y="5748016"/>
+              <a:off x="2562866" y="5739421"/>
               <a:ext cx="0" cy="56936"/>
             </a:xfrm>
             <a:custGeom>
@@ -7387,7 +7387,7 @@
           </p:nvSpPr>
           <p:spPr>
             <a:xfrm>
-              <a:off x="4046800" y="5748016"/>
+              <a:off x="4046800" y="5739421"/>
               <a:ext cx="0" cy="56936"/>
             </a:xfrm>
             <a:custGeom>
@@ -7427,7 +7427,7 @@
           </p:nvSpPr>
           <p:spPr>
             <a:xfrm>
-              <a:off x="5530734" y="5748016"/>
+              <a:off x="5530734" y="5739421"/>
               <a:ext cx="0" cy="56936"/>
             </a:xfrm>
             <a:custGeom>
@@ -7467,7 +7467,7 @@
           </p:nvSpPr>
           <p:spPr>
             <a:xfrm>
-              <a:off x="7014668" y="5748016"/>
+              <a:off x="7014668" y="5739421"/>
               <a:ext cx="0" cy="56936"/>
             </a:xfrm>
             <a:custGeom>
@@ -7507,7 +7507,7 @@
           </p:nvSpPr>
           <p:spPr>
             <a:xfrm>
-              <a:off x="8498602" y="5748016"/>
+              <a:off x="8498602" y="5739421"/>
               <a:ext cx="0" cy="56936"/>
             </a:xfrm>
             <a:custGeom>
@@ -7547,7 +7547,7 @@
           </p:nvSpPr>
           <p:spPr>
             <a:xfrm>
-              <a:off x="946343" y="5880868"/>
+              <a:off x="946343" y="5872272"/>
               <a:ext cx="265176" cy="161848"/>
             </a:xfrm>
             <a:prstGeom prst="rect">
@@ -7593,7 +7593,7 @@
           </p:nvSpPr>
           <p:spPr>
             <a:xfrm>
-              <a:off x="2430278" y="5880868"/>
+              <a:off x="2430278" y="5872272"/>
               <a:ext cx="265176" cy="161848"/>
             </a:xfrm>
             <a:prstGeom prst="rect">
@@ -7639,7 +7639,7 @@
           </p:nvSpPr>
           <p:spPr>
             <a:xfrm>
-              <a:off x="3914212" y="5880868"/>
+              <a:off x="3914212" y="5872272"/>
               <a:ext cx="265176" cy="161848"/>
             </a:xfrm>
             <a:prstGeom prst="rect">
@@ -7685,7 +7685,7 @@
           </p:nvSpPr>
           <p:spPr>
             <a:xfrm>
-              <a:off x="5398146" y="5880868"/>
+              <a:off x="5398146" y="5872272"/>
               <a:ext cx="265176" cy="161848"/>
             </a:xfrm>
             <a:prstGeom prst="rect">
@@ -7731,7 +7731,7 @@
           </p:nvSpPr>
           <p:spPr>
             <a:xfrm>
-              <a:off x="6882080" y="5880868"/>
+              <a:off x="6882080" y="5872272"/>
               <a:ext cx="265176" cy="161848"/>
             </a:xfrm>
             <a:prstGeom prst="rect">
@@ -7777,7 +7777,7 @@
           </p:nvSpPr>
           <p:spPr>
             <a:xfrm>
-              <a:off x="8366014" y="5880868"/>
+              <a:off x="8366014" y="5872272"/>
               <a:ext cx="265176" cy="161848"/>
             </a:xfrm>
             <a:prstGeom prst="rect">
@@ -7823,7 +7823,7 @@
           </p:nvSpPr>
           <p:spPr>
             <a:xfrm>
-              <a:off x="4439101" y="6150219"/>
+              <a:off x="4439101" y="6145922"/>
               <a:ext cx="491581" cy="161848"/>
             </a:xfrm>
             <a:prstGeom prst="rect">

--- a/tests/testthat/multi_slide_fullslide_43.pptx
+++ b/tests/testthat/multi_slide_fullslide_43.pptx
@@ -2659,8 +2659,8 @@
           </p:nvSpPr>
           <p:spPr>
             <a:xfrm>
-              <a:off x="1067762" y="1441338"/>
-              <a:ext cx="7493238" cy="4534095"/>
+              <a:off x="1065110" y="1441338"/>
+              <a:ext cx="7495890" cy="4538850"/>
             </a:xfrm>
             <a:prstGeom prst="rect">
               <a:avLst/>
@@ -2685,21 +2685,21 @@
           </p:nvSpPr>
           <p:spPr>
             <a:xfrm>
-              <a:off x="1067762" y="5400998"/>
-              <a:ext cx="7493238" cy="0"/>
+              <a:off x="1065110" y="5405150"/>
+              <a:ext cx="7495890" cy="0"/>
             </a:xfrm>
             <a:custGeom>
               <a:avLst/>
               <a:pathLst>
-                <a:path w="7493238" h="0">
+                <a:path w="7495890" h="0">
                   <a:moveTo>
                     <a:pt x="0" y="0"/>
                   </a:moveTo>
                   <a:lnTo>
-                    <a:pt x="7493238" y="0"/>
+                    <a:pt x="7495890" y="0"/>
                   </a:lnTo>
                   <a:lnTo>
-                    <a:pt x="7493238" y="0"/>
+                    <a:pt x="7495890" y="0"/>
                   </a:lnTo>
                 </a:path>
               </a:pathLst>
@@ -2728,21 +2728,21 @@
           </p:nvSpPr>
           <p:spPr>
             <a:xfrm>
-              <a:off x="1067762" y="4523996"/>
-              <a:ext cx="7493238" cy="0"/>
+              <a:off x="1065110" y="4527229"/>
+              <a:ext cx="7495890" cy="0"/>
             </a:xfrm>
             <a:custGeom>
               <a:avLst/>
               <a:pathLst>
-                <a:path w="7493238" h="0">
+                <a:path w="7495890" h="0">
                   <a:moveTo>
                     <a:pt x="0" y="0"/>
                   </a:moveTo>
                   <a:lnTo>
-                    <a:pt x="7493238" y="0"/>
+                    <a:pt x="7495890" y="0"/>
                   </a:lnTo>
                   <a:lnTo>
-                    <a:pt x="7493238" y="0"/>
+                    <a:pt x="7495890" y="0"/>
                   </a:lnTo>
                 </a:path>
               </a:pathLst>
@@ -2771,21 +2771,21 @@
           </p:nvSpPr>
           <p:spPr>
             <a:xfrm>
-              <a:off x="1067762" y="3646995"/>
-              <a:ext cx="7493238" cy="0"/>
+              <a:off x="1065110" y="3649308"/>
+              <a:ext cx="7495890" cy="0"/>
             </a:xfrm>
             <a:custGeom>
               <a:avLst/>
               <a:pathLst>
-                <a:path w="7493238" h="0">
+                <a:path w="7495890" h="0">
                   <a:moveTo>
                     <a:pt x="0" y="0"/>
                   </a:moveTo>
                   <a:lnTo>
-                    <a:pt x="7493238" y="0"/>
+                    <a:pt x="7495890" y="0"/>
                   </a:lnTo>
                   <a:lnTo>
-                    <a:pt x="7493238" y="0"/>
+                    <a:pt x="7495890" y="0"/>
                   </a:lnTo>
                 </a:path>
               </a:pathLst>
@@ -2814,21 +2814,21 @@
           </p:nvSpPr>
           <p:spPr>
             <a:xfrm>
-              <a:off x="1067762" y="2769994"/>
-              <a:ext cx="7493238" cy="0"/>
+              <a:off x="1065110" y="2771388"/>
+              <a:ext cx="7495890" cy="0"/>
             </a:xfrm>
             <a:custGeom>
               <a:avLst/>
               <a:pathLst>
-                <a:path w="7493238" h="0">
+                <a:path w="7495890" h="0">
                   <a:moveTo>
                     <a:pt x="0" y="0"/>
                   </a:moveTo>
                   <a:lnTo>
-                    <a:pt x="7493238" y="0"/>
+                    <a:pt x="7495890" y="0"/>
                   </a:lnTo>
                   <a:lnTo>
-                    <a:pt x="7493238" y="0"/>
+                    <a:pt x="7495890" y="0"/>
                   </a:lnTo>
                 </a:path>
               </a:pathLst>
@@ -2857,21 +2857,21 @@
           </p:nvSpPr>
           <p:spPr>
             <a:xfrm>
-              <a:off x="1067762" y="1892993"/>
-              <a:ext cx="7493238" cy="0"/>
+              <a:off x="1065110" y="1893467"/>
+              <a:ext cx="7495890" cy="0"/>
             </a:xfrm>
             <a:custGeom>
               <a:avLst/>
               <a:pathLst>
-                <a:path w="7493238" h="0">
+                <a:path w="7495890" h="0">
                   <a:moveTo>
                     <a:pt x="0" y="0"/>
                   </a:moveTo>
                   <a:lnTo>
-                    <a:pt x="7493238" y="0"/>
+                    <a:pt x="7495890" y="0"/>
                   </a:lnTo>
                   <a:lnTo>
-                    <a:pt x="7493238" y="0"/>
+                    <a:pt x="7495890" y="0"/>
                   </a:lnTo>
                 </a:path>
               </a:pathLst>
@@ -2900,15 +2900,15 @@
           </p:nvSpPr>
           <p:spPr>
             <a:xfrm>
-              <a:off x="1385721" y="1441338"/>
-              <a:ext cx="0" cy="4534095"/>
+              <a:off x="1383181" y="1441338"/>
+              <a:ext cx="0" cy="4538850"/>
             </a:xfrm>
             <a:custGeom>
               <a:avLst/>
               <a:pathLst>
-                <a:path w="0" h="4534095">
+                <a:path w="0" h="4538850">
                   <a:moveTo>
-                    <a:pt x="0" y="4534095"/>
+                    <a:pt x="0" y="4538850"/>
                   </a:moveTo>
                   <a:lnTo>
                     <a:pt x="0" y="0"/>
@@ -2943,15 +2943,15 @@
           </p:nvSpPr>
           <p:spPr>
             <a:xfrm>
-              <a:off x="3127484" y="1441338"/>
-              <a:ext cx="0" cy="4534095"/>
+              <a:off x="3125561" y="1441338"/>
+              <a:ext cx="0" cy="4538850"/>
             </a:xfrm>
             <a:custGeom>
               <a:avLst/>
               <a:pathLst>
-                <a:path w="0" h="4534095">
+                <a:path w="0" h="4538850">
                   <a:moveTo>
-                    <a:pt x="0" y="4534095"/>
+                    <a:pt x="0" y="4538850"/>
                   </a:moveTo>
                   <a:lnTo>
                     <a:pt x="0" y="0"/>
@@ -2986,15 +2986,15 @@
           </p:nvSpPr>
           <p:spPr>
             <a:xfrm>
-              <a:off x="4869247" y="1441338"/>
-              <a:ext cx="0" cy="4534095"/>
+              <a:off x="4867940" y="1441338"/>
+              <a:ext cx="0" cy="4538850"/>
             </a:xfrm>
             <a:custGeom>
               <a:avLst/>
               <a:pathLst>
-                <a:path w="0" h="4534095">
+                <a:path w="0" h="4538850">
                   <a:moveTo>
-                    <a:pt x="0" y="4534095"/>
+                    <a:pt x="0" y="4538850"/>
                   </a:moveTo>
                   <a:lnTo>
                     <a:pt x="0" y="0"/>
@@ -3029,15 +3029,15 @@
           </p:nvSpPr>
           <p:spPr>
             <a:xfrm>
-              <a:off x="6611010" y="1441338"/>
-              <a:ext cx="0" cy="4534095"/>
+              <a:off x="6610320" y="1441338"/>
+              <a:ext cx="0" cy="4538850"/>
             </a:xfrm>
             <a:custGeom>
               <a:avLst/>
               <a:pathLst>
-                <a:path w="0" h="4534095">
+                <a:path w="0" h="4538850">
                   <a:moveTo>
-                    <a:pt x="0" y="4534095"/>
+                    <a:pt x="0" y="4538850"/>
                   </a:moveTo>
                   <a:lnTo>
                     <a:pt x="0" y="0"/>
@@ -3072,15 +3072,15 @@
           </p:nvSpPr>
           <p:spPr>
             <a:xfrm>
-              <a:off x="8352773" y="1441338"/>
-              <a:ext cx="0" cy="4534095"/>
+              <a:off x="8352699" y="1441338"/>
+              <a:ext cx="0" cy="4538850"/>
             </a:xfrm>
             <a:custGeom>
               <a:avLst/>
               <a:pathLst>
-                <a:path w="0" h="4534095">
+                <a:path w="0" h="4538850">
                   <a:moveTo>
-                    <a:pt x="0" y="4534095"/>
+                    <a:pt x="0" y="4538850"/>
                   </a:moveTo>
                   <a:lnTo>
                     <a:pt x="0" y="0"/>
@@ -3115,21 +3115,21 @@
           </p:nvSpPr>
           <p:spPr>
             <a:xfrm>
-              <a:off x="1067762" y="5839498"/>
-              <a:ext cx="7493238" cy="0"/>
+              <a:off x="1065110" y="5844110"/>
+              <a:ext cx="7495890" cy="0"/>
             </a:xfrm>
             <a:custGeom>
               <a:avLst/>
               <a:pathLst>
-                <a:path w="7493238" h="0">
+                <a:path w="7495890" h="0">
                   <a:moveTo>
                     <a:pt x="0" y="0"/>
                   </a:moveTo>
                   <a:lnTo>
-                    <a:pt x="7493238" y="0"/>
+                    <a:pt x="7495890" y="0"/>
                   </a:lnTo>
                   <a:lnTo>
-                    <a:pt x="7493238" y="0"/>
+                    <a:pt x="7495890" y="0"/>
                   </a:lnTo>
                 </a:path>
               </a:pathLst>
@@ -3158,21 +3158,21 @@
           </p:nvSpPr>
           <p:spPr>
             <a:xfrm>
-              <a:off x="1067762" y="4962497"/>
-              <a:ext cx="7493238" cy="0"/>
+              <a:off x="1065110" y="4966190"/>
+              <a:ext cx="7495890" cy="0"/>
             </a:xfrm>
             <a:custGeom>
               <a:avLst/>
               <a:pathLst>
-                <a:path w="7493238" h="0">
+                <a:path w="7495890" h="0">
                   <a:moveTo>
                     <a:pt x="0" y="0"/>
                   </a:moveTo>
                   <a:lnTo>
-                    <a:pt x="7493238" y="0"/>
+                    <a:pt x="7495890" y="0"/>
                   </a:lnTo>
                   <a:lnTo>
-                    <a:pt x="7493238" y="0"/>
+                    <a:pt x="7495890" y="0"/>
                   </a:lnTo>
                 </a:path>
               </a:pathLst>
@@ -3201,21 +3201,21 @@
           </p:nvSpPr>
           <p:spPr>
             <a:xfrm>
-              <a:off x="1067762" y="4085496"/>
-              <a:ext cx="7493238" cy="0"/>
+              <a:off x="1065110" y="4088269"/>
+              <a:ext cx="7495890" cy="0"/>
             </a:xfrm>
             <a:custGeom>
               <a:avLst/>
               <a:pathLst>
-                <a:path w="7493238" h="0">
+                <a:path w="7495890" h="0">
                   <a:moveTo>
                     <a:pt x="0" y="0"/>
                   </a:moveTo>
                   <a:lnTo>
-                    <a:pt x="7493238" y="0"/>
+                    <a:pt x="7495890" y="0"/>
                   </a:lnTo>
                   <a:lnTo>
-                    <a:pt x="7493238" y="0"/>
+                    <a:pt x="7495890" y="0"/>
                   </a:lnTo>
                 </a:path>
               </a:pathLst>
@@ -3244,21 +3244,21 @@
           </p:nvSpPr>
           <p:spPr>
             <a:xfrm>
-              <a:off x="1067762" y="3208495"/>
-              <a:ext cx="7493238" cy="0"/>
+              <a:off x="1065110" y="3210348"/>
+              <a:ext cx="7495890" cy="0"/>
             </a:xfrm>
             <a:custGeom>
               <a:avLst/>
               <a:pathLst>
-                <a:path w="7493238" h="0">
+                <a:path w="7495890" h="0">
                   <a:moveTo>
                     <a:pt x="0" y="0"/>
                   </a:moveTo>
                   <a:lnTo>
-                    <a:pt x="7493238" y="0"/>
+                    <a:pt x="7495890" y="0"/>
                   </a:lnTo>
                   <a:lnTo>
-                    <a:pt x="7493238" y="0"/>
+                    <a:pt x="7495890" y="0"/>
                   </a:lnTo>
                 </a:path>
               </a:pathLst>
@@ -3287,21 +3287,21 @@
           </p:nvSpPr>
           <p:spPr>
             <a:xfrm>
-              <a:off x="1067762" y="2331494"/>
-              <a:ext cx="7493238" cy="0"/>
+              <a:off x="1065110" y="2332427"/>
+              <a:ext cx="7495890" cy="0"/>
             </a:xfrm>
             <a:custGeom>
               <a:avLst/>
               <a:pathLst>
-                <a:path w="7493238" h="0">
+                <a:path w="7495890" h="0">
                   <a:moveTo>
                     <a:pt x="0" y="0"/>
                   </a:moveTo>
                   <a:lnTo>
-                    <a:pt x="7493238" y="0"/>
+                    <a:pt x="7495890" y="0"/>
                   </a:lnTo>
                   <a:lnTo>
-                    <a:pt x="7493238" y="0"/>
+                    <a:pt x="7495890" y="0"/>
                   </a:lnTo>
                 </a:path>
               </a:pathLst>
@@ -3330,21 +3330,21 @@
           </p:nvSpPr>
           <p:spPr>
             <a:xfrm>
-              <a:off x="1067762" y="1454493"/>
-              <a:ext cx="7493238" cy="0"/>
+              <a:off x="1065110" y="1454506"/>
+              <a:ext cx="7495890" cy="0"/>
             </a:xfrm>
             <a:custGeom>
               <a:avLst/>
               <a:pathLst>
-                <a:path w="7493238" h="0">
+                <a:path w="7495890" h="0">
                   <a:moveTo>
                     <a:pt x="0" y="0"/>
                   </a:moveTo>
                   <a:lnTo>
-                    <a:pt x="7493238" y="0"/>
+                    <a:pt x="7495890" y="0"/>
                   </a:lnTo>
                   <a:lnTo>
-                    <a:pt x="7493238" y="0"/>
+                    <a:pt x="7495890" y="0"/>
                   </a:lnTo>
                 </a:path>
               </a:pathLst>
@@ -3373,15 +3373,15 @@
           </p:nvSpPr>
           <p:spPr>
             <a:xfrm>
-              <a:off x="2256602" y="1441338"/>
-              <a:ext cx="0" cy="4534095"/>
+              <a:off x="2254371" y="1441338"/>
+              <a:ext cx="0" cy="4538850"/>
             </a:xfrm>
             <a:custGeom>
               <a:avLst/>
               <a:pathLst>
-                <a:path w="0" h="4534095">
+                <a:path w="0" h="4538850">
                   <a:moveTo>
-                    <a:pt x="0" y="4534095"/>
+                    <a:pt x="0" y="4538850"/>
                   </a:moveTo>
                   <a:lnTo>
                     <a:pt x="0" y="0"/>
@@ -3416,15 +3416,15 @@
           </p:nvSpPr>
           <p:spPr>
             <a:xfrm>
-              <a:off x="3998365" y="1441338"/>
-              <a:ext cx="0" cy="4534095"/>
+              <a:off x="3996750" y="1441338"/>
+              <a:ext cx="0" cy="4538850"/>
             </a:xfrm>
             <a:custGeom>
               <a:avLst/>
               <a:pathLst>
-                <a:path w="0" h="4534095">
+                <a:path w="0" h="4538850">
                   <a:moveTo>
-                    <a:pt x="0" y="4534095"/>
+                    <a:pt x="0" y="4538850"/>
                   </a:moveTo>
                   <a:lnTo>
                     <a:pt x="0" y="0"/>
@@ -3459,15 +3459,15 @@
           </p:nvSpPr>
           <p:spPr>
             <a:xfrm>
-              <a:off x="5740128" y="1441338"/>
-              <a:ext cx="0" cy="4534095"/>
+              <a:off x="5739130" y="1441338"/>
+              <a:ext cx="0" cy="4538850"/>
             </a:xfrm>
             <a:custGeom>
               <a:avLst/>
               <a:pathLst>
-                <a:path w="0" h="4534095">
+                <a:path w="0" h="4538850">
                   <a:moveTo>
-                    <a:pt x="0" y="4534095"/>
+                    <a:pt x="0" y="4538850"/>
                   </a:moveTo>
                   <a:lnTo>
                     <a:pt x="0" y="0"/>
@@ -3502,15 +3502,15 @@
           </p:nvSpPr>
           <p:spPr>
             <a:xfrm>
-              <a:off x="7481891" y="1441338"/>
-              <a:ext cx="0" cy="4534095"/>
+              <a:off x="7481509" y="1441338"/>
+              <a:ext cx="0" cy="4538850"/>
             </a:xfrm>
             <a:custGeom>
               <a:avLst/>
               <a:pathLst>
-                <a:path w="0" h="4534095">
+                <a:path w="0" h="4538850">
                   <a:moveTo>
-                    <a:pt x="0" y="4534095"/>
+                    <a:pt x="0" y="4538850"/>
                   </a:moveTo>
                   <a:lnTo>
                     <a:pt x="0" y="0"/>
@@ -3545,7 +3545,7 @@
           </p:nvSpPr>
           <p:spPr>
             <a:xfrm>
-              <a:off x="3303420" y="3877021"/>
+              <a:off x="3301571" y="3879610"/>
               <a:ext cx="66150" cy="66150"/>
             </a:xfrm>
             <a:prstGeom prst="ellipse">
@@ -3580,7 +3580,7 @@
           </p:nvSpPr>
           <p:spPr>
             <a:xfrm>
-              <a:off x="3747570" y="3877021"/>
+              <a:off x="3745878" y="3879610"/>
               <a:ext cx="66150" cy="66150"/>
             </a:xfrm>
             <a:prstGeom prst="ellipse">
@@ -3615,7 +3615,7 @@
           </p:nvSpPr>
           <p:spPr>
             <a:xfrm>
-              <a:off x="2780891" y="3561300"/>
+              <a:off x="2778857" y="3563558"/>
               <a:ext cx="66150" cy="66150"/>
             </a:xfrm>
             <a:prstGeom prst="ellipse">
@@ -3650,7 +3650,7 @@
           </p:nvSpPr>
           <p:spPr>
             <a:xfrm>
-              <a:off x="4339769" y="3806861"/>
+              <a:off x="4338287" y="3809376"/>
               <a:ext cx="66150" cy="66150"/>
             </a:xfrm>
             <a:prstGeom prst="ellipse">
@@ -3685,7 +3685,7 @@
           </p:nvSpPr>
           <p:spPr>
             <a:xfrm>
-              <a:off x="4731666" y="4280441"/>
+              <a:off x="4730322" y="4283453"/>
               <a:ext cx="66150" cy="66150"/>
             </a:xfrm>
             <a:prstGeom prst="ellipse">
@@ -3720,7 +3720,7 @@
           </p:nvSpPr>
           <p:spPr>
             <a:xfrm>
-              <a:off x="4766501" y="4385681"/>
+              <a:off x="4765170" y="4388804"/>
               <a:ext cx="66150" cy="66150"/>
             </a:xfrm>
             <a:prstGeom prst="ellipse">
@@ -3755,7 +3755,7 @@
           </p:nvSpPr>
           <p:spPr>
             <a:xfrm>
-              <a:off x="4958095" y="5052202"/>
+              <a:off x="4956832" y="5056024"/>
               <a:ext cx="66150" cy="66150"/>
             </a:xfrm>
             <a:prstGeom prst="ellipse">
@@ -3790,7 +3790,7 @@
           </p:nvSpPr>
           <p:spPr>
             <a:xfrm>
-              <a:off x="4296225" y="3280660"/>
+              <a:off x="4294728" y="3282623"/>
               <a:ext cx="66150" cy="66150"/>
             </a:xfrm>
             <a:prstGeom prst="ellipse">
@@ -3825,7 +3825,7 @@
           </p:nvSpPr>
           <p:spPr>
             <a:xfrm>
-              <a:off x="4226555" y="3561300"/>
+              <a:off x="4225032" y="3563558"/>
               <a:ext cx="66150" cy="66150"/>
             </a:xfrm>
             <a:prstGeom prst="ellipse">
@@ -3860,7 +3860,7 @@
           </p:nvSpPr>
           <p:spPr>
             <a:xfrm>
-              <a:off x="4731666" y="4192741"/>
+              <a:off x="4730322" y="4195661"/>
               <a:ext cx="66150" cy="66150"/>
             </a:xfrm>
             <a:prstGeom prst="ellipse">
@@ -3895,7 +3895,7 @@
           </p:nvSpPr>
           <p:spPr>
             <a:xfrm>
-              <a:off x="4731666" y="4438301"/>
+              <a:off x="4730322" y="4441479"/>
               <a:ext cx="66150" cy="66150"/>
             </a:xfrm>
             <a:prstGeom prst="ellipse">
@@ -3930,7 +3930,7 @@
           </p:nvSpPr>
           <p:spPr>
             <a:xfrm>
-              <a:off x="5828977" y="4683862"/>
+              <a:off x="5828021" y="4687297"/>
               <a:ext cx="66150" cy="66150"/>
             </a:xfrm>
             <a:prstGeom prst="ellipse">
@@ -3965,7 +3965,7 @@
           </p:nvSpPr>
           <p:spPr>
             <a:xfrm>
-              <a:off x="5236777" y="4526001"/>
+              <a:off x="5235612" y="4529271"/>
               <a:ext cx="66150" cy="66150"/>
             </a:xfrm>
             <a:prstGeom prst="ellipse">
@@ -4000,7 +4000,7 @@
           </p:nvSpPr>
           <p:spPr>
             <a:xfrm>
-              <a:off x="5323865" y="4894342"/>
+              <a:off x="5322731" y="4897998"/>
               <a:ext cx="66150" cy="66150"/>
             </a:xfrm>
             <a:prstGeom prst="ellipse">
@@ -4035,7 +4035,7 @@
           </p:nvSpPr>
           <p:spPr>
             <a:xfrm>
-              <a:off x="7884257" y="5736263"/>
+              <a:off x="7884029" y="5740802"/>
               <a:ext cx="66150" cy="66150"/>
             </a:xfrm>
             <a:prstGeom prst="ellipse">
@@ -4070,7 +4070,7 @@
           </p:nvSpPr>
           <p:spPr>
             <a:xfrm>
-              <a:off x="8187324" y="5736263"/>
+              <a:off x="8187203" y="5740802"/>
               <a:ext cx="66150" cy="66150"/>
             </a:xfrm>
             <a:prstGeom prst="ellipse">
@@ -4105,7 +4105,7 @@
           </p:nvSpPr>
           <p:spPr>
             <a:xfrm>
-              <a:off x="8049724" y="4982042"/>
+              <a:off x="8049555" y="4985790"/>
               <a:ext cx="66150" cy="66150"/>
             </a:xfrm>
             <a:prstGeom prst="ellipse">
@@ -4140,7 +4140,7 @@
           </p:nvSpPr>
           <p:spPr>
             <a:xfrm>
-              <a:off x="2571880" y="1877458"/>
+              <a:off x="2569772" y="1877950"/>
               <a:ext cx="66150" cy="66150"/>
             </a:xfrm>
             <a:prstGeom prst="ellipse">
@@ -4175,7 +4175,7 @@
           </p:nvSpPr>
           <p:spPr>
             <a:xfrm>
-              <a:off x="1552948" y="2228259"/>
+              <a:off x="1550480" y="2229119"/>
               <a:ext cx="66150" cy="66150"/>
             </a:xfrm>
             <a:prstGeom prst="ellipse">
@@ -4210,7 +4210,7 @@
           </p:nvSpPr>
           <p:spPr>
             <a:xfrm>
-              <a:off x="1936136" y="1614358"/>
+              <a:off x="1933803" y="1614574"/>
               <a:ext cx="66150" cy="66150"/>
             </a:xfrm>
             <a:prstGeom prst="ellipse">
@@ -4245,7 +4245,7 @@
           </p:nvSpPr>
           <p:spPr>
             <a:xfrm>
-              <a:off x="3033447" y="3789321"/>
+              <a:off x="3031502" y="3791818"/>
               <a:ext cx="66150" cy="66150"/>
             </a:xfrm>
             <a:prstGeom prst="ellipse">
@@ -4280,7 +4280,7 @@
           </p:nvSpPr>
           <p:spPr>
             <a:xfrm>
-              <a:off x="4871007" y="4841722"/>
+              <a:off x="4869713" y="4845323"/>
               <a:ext cx="66150" cy="66150"/>
             </a:xfrm>
             <a:prstGeom prst="ellipse">
@@ -4315,7 +4315,7 @@
           </p:nvSpPr>
           <p:spPr>
             <a:xfrm>
-              <a:off x="4722957" y="4894342"/>
+              <a:off x="4721610" y="4897998"/>
               <a:ext cx="66150" cy="66150"/>
             </a:xfrm>
             <a:prstGeom prst="ellipse">
@@ -4350,7 +4350,7 @@
           </p:nvSpPr>
           <p:spPr>
             <a:xfrm>
-              <a:off x="5428371" y="5227602"/>
+              <a:off x="5427274" y="5231608"/>
               <a:ext cx="66150" cy="66150"/>
             </a:xfrm>
             <a:prstGeom prst="ellipse">
@@ -4385,7 +4385,7 @@
           </p:nvSpPr>
           <p:spPr>
             <a:xfrm>
-              <a:off x="5437080" y="4192741"/>
+              <a:off x="5435986" y="4195661"/>
               <a:ext cx="66150" cy="66150"/>
             </a:xfrm>
             <a:prstGeom prst="ellipse">
@@ -4420,7 +4420,7 @@
           </p:nvSpPr>
           <p:spPr>
             <a:xfrm>
-              <a:off x="2110312" y="2771999"/>
+              <a:off x="2108041" y="2773429"/>
               <a:ext cx="66150" cy="66150"/>
             </a:xfrm>
             <a:prstGeom prst="ellipse">
@@ -4455,7 +4455,7 @@
           </p:nvSpPr>
           <p:spPr>
             <a:xfrm>
-              <a:off x="2467374" y="3000020"/>
+              <a:off x="2465229" y="3001689"/>
               <a:ext cx="66150" cy="66150"/>
             </a:xfrm>
             <a:prstGeom prst="ellipse">
@@ -4490,7 +4490,7 @@
           </p:nvSpPr>
           <p:spPr>
             <a:xfrm>
-              <a:off x="1375288" y="2228259"/>
+              <a:off x="1372757" y="2229119"/>
               <a:ext cx="66150" cy="66150"/>
             </a:xfrm>
             <a:prstGeom prst="ellipse">
@@ -4525,7 +4525,7 @@
           </p:nvSpPr>
           <p:spPr>
             <a:xfrm>
-              <a:off x="4261390" y="4789102"/>
+              <a:off x="4259880" y="4792647"/>
               <a:ext cx="66150" cy="66150"/>
             </a:xfrm>
             <a:prstGeom prst="ellipse">
@@ -4560,7 +4560,7 @@
           </p:nvSpPr>
           <p:spPr>
             <a:xfrm>
-              <a:off x="3564685" y="4105041"/>
+              <a:off x="3562928" y="4107869"/>
               <a:ext cx="66150" cy="66150"/>
             </a:xfrm>
             <a:prstGeom prst="ellipse">
@@ -4595,7 +4595,7 @@
           </p:nvSpPr>
           <p:spPr>
             <a:xfrm>
-              <a:off x="4958095" y="4929422"/>
+              <a:off x="4956832" y="4933115"/>
               <a:ext cx="66150" cy="66150"/>
             </a:xfrm>
             <a:prstGeom prst="ellipse">
@@ -4630,7 +4630,7 @@
           </p:nvSpPr>
           <p:spPr>
             <a:xfrm>
-              <a:off x="3582102" y="3806861"/>
+              <a:off x="3580352" y="3809376"/>
               <a:ext cx="66150" cy="66150"/>
             </a:xfrm>
             <a:prstGeom prst="ellipse">
@@ -4665,7 +4665,7 @@
           </p:nvSpPr>
           <p:spPr>
             <a:xfrm>
-              <a:off x="875470" y="5799950"/>
+              <a:off x="872818" y="5804563"/>
               <a:ext cx="129661" cy="79095"/>
             </a:xfrm>
             <a:prstGeom prst="rect">
@@ -4711,7 +4711,7 @@
           </p:nvSpPr>
           <p:spPr>
             <a:xfrm>
-              <a:off x="875470" y="4922949"/>
+              <a:off x="872818" y="4926642"/>
               <a:ext cx="129661" cy="79095"/>
             </a:xfrm>
             <a:prstGeom prst="rect">
@@ -4757,7 +4757,7 @@
           </p:nvSpPr>
           <p:spPr>
             <a:xfrm>
-              <a:off x="875470" y="4045948"/>
+              <a:off x="872818" y="4048721"/>
               <a:ext cx="129661" cy="79095"/>
             </a:xfrm>
             <a:prstGeom prst="rect">
@@ -4803,7 +4803,7 @@
           </p:nvSpPr>
           <p:spPr>
             <a:xfrm>
-              <a:off x="875470" y="3168947"/>
+              <a:off x="872818" y="3170800"/>
               <a:ext cx="129661" cy="79095"/>
             </a:xfrm>
             <a:prstGeom prst="rect">
@@ -4849,7 +4849,7 @@
           </p:nvSpPr>
           <p:spPr>
             <a:xfrm>
-              <a:off x="875470" y="2291946"/>
+              <a:off x="872818" y="2292879"/>
               <a:ext cx="129661" cy="79095"/>
             </a:xfrm>
             <a:prstGeom prst="rect">
@@ -4895,7 +4895,7 @@
           </p:nvSpPr>
           <p:spPr>
             <a:xfrm>
-              <a:off x="875470" y="1414945"/>
+              <a:off x="872818" y="1414959"/>
               <a:ext cx="129661" cy="79095"/>
             </a:xfrm>
             <a:prstGeom prst="rect">
@@ -4941,7 +4941,7 @@
           </p:nvSpPr>
           <p:spPr>
             <a:xfrm>
-              <a:off x="1032967" y="5839498"/>
+              <a:off x="1030315" y="5844110"/>
               <a:ext cx="34794" cy="0"/>
             </a:xfrm>
             <a:custGeom>
@@ -4981,7 +4981,7 @@
           </p:nvSpPr>
           <p:spPr>
             <a:xfrm>
-              <a:off x="1032967" y="4962497"/>
+              <a:off x="1030315" y="4966190"/>
               <a:ext cx="34794" cy="0"/>
             </a:xfrm>
             <a:custGeom>
@@ -5021,7 +5021,7 @@
           </p:nvSpPr>
           <p:spPr>
             <a:xfrm>
-              <a:off x="1032967" y="4085496"/>
+              <a:off x="1030315" y="4088269"/>
               <a:ext cx="34794" cy="0"/>
             </a:xfrm>
             <a:custGeom>
@@ -5061,7 +5061,7 @@
           </p:nvSpPr>
           <p:spPr>
             <a:xfrm>
-              <a:off x="1032967" y="3208495"/>
+              <a:off x="1030315" y="3210348"/>
               <a:ext cx="34794" cy="0"/>
             </a:xfrm>
             <a:custGeom>
@@ -5101,7 +5101,7 @@
           </p:nvSpPr>
           <p:spPr>
             <a:xfrm>
-              <a:off x="1032967" y="2331494"/>
+              <a:off x="1030315" y="2332427"/>
               <a:ext cx="34794" cy="0"/>
             </a:xfrm>
             <a:custGeom>
@@ -5141,7 +5141,7 @@
           </p:nvSpPr>
           <p:spPr>
             <a:xfrm>
-              <a:off x="1032967" y="1454493"/>
+              <a:off x="1030315" y="1454506"/>
               <a:ext cx="34794" cy="0"/>
             </a:xfrm>
             <a:custGeom>
@@ -5181,7 +5181,7 @@
           </p:nvSpPr>
           <p:spPr>
             <a:xfrm>
-              <a:off x="2256602" y="5975433"/>
+              <a:off x="2254371" y="5980188"/>
               <a:ext cx="0" cy="34794"/>
             </a:xfrm>
             <a:custGeom>
@@ -5221,7 +5221,7 @@
           </p:nvSpPr>
           <p:spPr>
             <a:xfrm>
-              <a:off x="3998365" y="5975433"/>
+              <a:off x="3996750" y="5980188"/>
               <a:ext cx="0" cy="34794"/>
             </a:xfrm>
             <a:custGeom>
@@ -5261,7 +5261,7 @@
           </p:nvSpPr>
           <p:spPr>
             <a:xfrm>
-              <a:off x="5740128" y="5975433"/>
+              <a:off x="5739130" y="5980188"/>
               <a:ext cx="0" cy="34794"/>
             </a:xfrm>
             <a:custGeom>
@@ -5301,7 +5301,7 @@
           </p:nvSpPr>
           <p:spPr>
             <a:xfrm>
-              <a:off x="7481891" y="5975433"/>
+              <a:off x="7481509" y="5980188"/>
               <a:ext cx="0" cy="34794"/>
             </a:xfrm>
             <a:custGeom>
@@ -5341,7 +5341,7 @@
           </p:nvSpPr>
           <p:spPr>
             <a:xfrm>
-              <a:off x="2224187" y="6038063"/>
+              <a:off x="2221956" y="6042818"/>
               <a:ext cx="64830" cy="79095"/>
             </a:xfrm>
             <a:prstGeom prst="rect">
@@ -5387,7 +5387,7 @@
           </p:nvSpPr>
           <p:spPr>
             <a:xfrm>
-              <a:off x="3965950" y="6038063"/>
+              <a:off x="3964335" y="6042818"/>
               <a:ext cx="64830" cy="79095"/>
             </a:xfrm>
             <a:prstGeom prst="rect">
@@ -5433,7 +5433,7 @@
           </p:nvSpPr>
           <p:spPr>
             <a:xfrm>
-              <a:off x="5707713" y="6038063"/>
+              <a:off x="5706714" y="6042818"/>
               <a:ext cx="64830" cy="79095"/>
             </a:xfrm>
             <a:prstGeom prst="rect">
@@ -5479,7 +5479,7 @@
           </p:nvSpPr>
           <p:spPr>
             <a:xfrm>
-              <a:off x="7449476" y="6038063"/>
+              <a:off x="7449094" y="6042818"/>
               <a:ext cx="64830" cy="79095"/>
             </a:xfrm>
             <a:prstGeom prst="rect">
@@ -5525,7 +5525,7 @@
           </p:nvSpPr>
           <p:spPr>
             <a:xfrm>
-              <a:off x="4740132" y="6178837"/>
+              <a:off x="4738806" y="6181489"/>
               <a:ext cx="148498" cy="98938"/>
             </a:xfrm>
             <a:prstGeom prst="rect">
@@ -5571,7 +5571,7 @@
           </p:nvSpPr>
           <p:spPr>
             <a:xfrm rot="-5400000">
-              <a:off x="607457" y="3658916"/>
+              <a:off x="607457" y="3661294"/>
               <a:ext cx="300380" cy="98938"/>
             </a:xfrm>
             <a:prstGeom prst="rect">

--- a/tests/testthat/multi_slide_fullslide_43.pptx
+++ b/tests/testthat/multi_slide_fullslide_43.pptx
@@ -2659,8 +2659,8 @@
           </p:nvSpPr>
           <p:spPr>
             <a:xfrm>
-              <a:off x="1065110" y="1441338"/>
-              <a:ext cx="7495890" cy="4538850"/>
+              <a:off x="1063647" y="1441338"/>
+              <a:ext cx="7497353" cy="4541593"/>
             </a:xfrm>
             <a:prstGeom prst="rect">
               <a:avLst/>
@@ -2685,21 +2685,21 @@
           </p:nvSpPr>
           <p:spPr>
             <a:xfrm>
-              <a:off x="1065110" y="5405150"/>
-              <a:ext cx="7495890" cy="0"/>
+              <a:off x="1063647" y="5407546"/>
+              <a:ext cx="7497353" cy="0"/>
             </a:xfrm>
             <a:custGeom>
               <a:avLst/>
               <a:pathLst>
-                <a:path w="7495890" h="0">
+                <a:path w="7497353" h="0">
                   <a:moveTo>
                     <a:pt x="0" y="0"/>
                   </a:moveTo>
                   <a:lnTo>
-                    <a:pt x="7495890" y="0"/>
+                    <a:pt x="7497353" y="0"/>
                   </a:lnTo>
                   <a:lnTo>
-                    <a:pt x="7495890" y="0"/>
+                    <a:pt x="7497353" y="0"/>
                   </a:lnTo>
                 </a:path>
               </a:pathLst>
@@ -2728,21 +2728,21 @@
           </p:nvSpPr>
           <p:spPr>
             <a:xfrm>
-              <a:off x="1065110" y="4527229"/>
-              <a:ext cx="7495890" cy="0"/>
+              <a:off x="1063647" y="4529094"/>
+              <a:ext cx="7497353" cy="0"/>
             </a:xfrm>
             <a:custGeom>
               <a:avLst/>
               <a:pathLst>
-                <a:path w="7495890" h="0">
+                <a:path w="7497353" h="0">
                   <a:moveTo>
                     <a:pt x="0" y="0"/>
                   </a:moveTo>
                   <a:lnTo>
-                    <a:pt x="7495890" y="0"/>
+                    <a:pt x="7497353" y="0"/>
                   </a:lnTo>
                   <a:lnTo>
-                    <a:pt x="7495890" y="0"/>
+                    <a:pt x="7497353" y="0"/>
                   </a:lnTo>
                 </a:path>
               </a:pathLst>
@@ -2771,21 +2771,21 @@
           </p:nvSpPr>
           <p:spPr>
             <a:xfrm>
-              <a:off x="1065110" y="3649308"/>
-              <a:ext cx="7495890" cy="0"/>
+              <a:off x="1063647" y="3650643"/>
+              <a:ext cx="7497353" cy="0"/>
             </a:xfrm>
             <a:custGeom>
               <a:avLst/>
               <a:pathLst>
-                <a:path w="7495890" h="0">
+                <a:path w="7497353" h="0">
                   <a:moveTo>
                     <a:pt x="0" y="0"/>
                   </a:moveTo>
                   <a:lnTo>
-                    <a:pt x="7495890" y="0"/>
+                    <a:pt x="7497353" y="0"/>
                   </a:lnTo>
                   <a:lnTo>
-                    <a:pt x="7495890" y="0"/>
+                    <a:pt x="7497353" y="0"/>
                   </a:lnTo>
                 </a:path>
               </a:pathLst>
@@ -2814,21 +2814,21 @@
           </p:nvSpPr>
           <p:spPr>
             <a:xfrm>
-              <a:off x="1065110" y="2771388"/>
-              <a:ext cx="7495890" cy="0"/>
+              <a:off x="1063647" y="2772191"/>
+              <a:ext cx="7497353" cy="0"/>
             </a:xfrm>
             <a:custGeom>
               <a:avLst/>
               <a:pathLst>
-                <a:path w="7495890" h="0">
+                <a:path w="7497353" h="0">
                   <a:moveTo>
                     <a:pt x="0" y="0"/>
                   </a:moveTo>
                   <a:lnTo>
-                    <a:pt x="7495890" y="0"/>
+                    <a:pt x="7497353" y="0"/>
                   </a:lnTo>
                   <a:lnTo>
-                    <a:pt x="7495890" y="0"/>
+                    <a:pt x="7497353" y="0"/>
                   </a:lnTo>
                 </a:path>
               </a:pathLst>
@@ -2857,21 +2857,21 @@
           </p:nvSpPr>
           <p:spPr>
             <a:xfrm>
-              <a:off x="1065110" y="1893467"/>
-              <a:ext cx="7495890" cy="0"/>
+              <a:off x="1063647" y="1893740"/>
+              <a:ext cx="7497353" cy="0"/>
             </a:xfrm>
             <a:custGeom>
               <a:avLst/>
               <a:pathLst>
-                <a:path w="7495890" h="0">
+                <a:path w="7497353" h="0">
                   <a:moveTo>
                     <a:pt x="0" y="0"/>
                   </a:moveTo>
                   <a:lnTo>
-                    <a:pt x="7495890" y="0"/>
+                    <a:pt x="7497353" y="0"/>
                   </a:lnTo>
                   <a:lnTo>
-                    <a:pt x="7495890" y="0"/>
+                    <a:pt x="7497353" y="0"/>
                   </a:lnTo>
                 </a:path>
               </a:pathLst>
@@ -2900,15 +2900,15 @@
           </p:nvSpPr>
           <p:spPr>
             <a:xfrm>
-              <a:off x="1383181" y="1441338"/>
-              <a:ext cx="0" cy="4538850"/>
+              <a:off x="1381780" y="1441338"/>
+              <a:ext cx="0" cy="4541593"/>
             </a:xfrm>
             <a:custGeom>
               <a:avLst/>
               <a:pathLst>
-                <a:path w="0" h="4538850">
+                <a:path w="0" h="4541593">
                   <a:moveTo>
-                    <a:pt x="0" y="4538850"/>
+                    <a:pt x="0" y="4541593"/>
                   </a:moveTo>
                   <a:lnTo>
                     <a:pt x="0" y="0"/>
@@ -2943,15 +2943,15 @@
           </p:nvSpPr>
           <p:spPr>
             <a:xfrm>
-              <a:off x="3125561" y="1441338"/>
-              <a:ext cx="0" cy="4538850"/>
+              <a:off x="3124500" y="1441338"/>
+              <a:ext cx="0" cy="4541593"/>
             </a:xfrm>
             <a:custGeom>
               <a:avLst/>
               <a:pathLst>
-                <a:path w="0" h="4538850">
+                <a:path w="0" h="4541593">
                   <a:moveTo>
-                    <a:pt x="0" y="4538850"/>
+                    <a:pt x="0" y="4541593"/>
                   </a:moveTo>
                   <a:lnTo>
                     <a:pt x="0" y="0"/>
@@ -2986,15 +2986,15 @@
           </p:nvSpPr>
           <p:spPr>
             <a:xfrm>
-              <a:off x="4867940" y="1441338"/>
-              <a:ext cx="0" cy="4538850"/>
+              <a:off x="4867219" y="1441338"/>
+              <a:ext cx="0" cy="4541593"/>
             </a:xfrm>
             <a:custGeom>
               <a:avLst/>
               <a:pathLst>
-                <a:path w="0" h="4538850">
+                <a:path w="0" h="4541593">
                   <a:moveTo>
-                    <a:pt x="0" y="4538850"/>
+                    <a:pt x="0" y="4541593"/>
                   </a:moveTo>
                   <a:lnTo>
                     <a:pt x="0" y="0"/>
@@ -3029,15 +3029,15 @@
           </p:nvSpPr>
           <p:spPr>
             <a:xfrm>
-              <a:off x="6610320" y="1441338"/>
-              <a:ext cx="0" cy="4538850"/>
+              <a:off x="6609939" y="1441338"/>
+              <a:ext cx="0" cy="4541593"/>
             </a:xfrm>
             <a:custGeom>
               <a:avLst/>
               <a:pathLst>
-                <a:path w="0" h="4538850">
+                <a:path w="0" h="4541593">
                   <a:moveTo>
-                    <a:pt x="0" y="4538850"/>
+                    <a:pt x="0" y="4541593"/>
                   </a:moveTo>
                   <a:lnTo>
                     <a:pt x="0" y="0"/>
@@ -3072,15 +3072,15 @@
           </p:nvSpPr>
           <p:spPr>
             <a:xfrm>
-              <a:off x="8352699" y="1441338"/>
-              <a:ext cx="0" cy="4538850"/>
+              <a:off x="8352658" y="1441338"/>
+              <a:ext cx="0" cy="4541593"/>
             </a:xfrm>
             <a:custGeom>
               <a:avLst/>
               <a:pathLst>
-                <a:path w="0" h="4538850">
+                <a:path w="0" h="4541593">
                   <a:moveTo>
-                    <a:pt x="0" y="4538850"/>
+                    <a:pt x="0" y="4541593"/>
                   </a:moveTo>
                   <a:lnTo>
                     <a:pt x="0" y="0"/>
@@ -3115,21 +3115,21 @@
           </p:nvSpPr>
           <p:spPr>
             <a:xfrm>
-              <a:off x="1065110" y="5844110"/>
-              <a:ext cx="7495890" cy="0"/>
+              <a:off x="1063647" y="5846771"/>
+              <a:ext cx="7497353" cy="0"/>
             </a:xfrm>
             <a:custGeom>
               <a:avLst/>
               <a:pathLst>
-                <a:path w="7495890" h="0">
+                <a:path w="7497353" h="0">
                   <a:moveTo>
                     <a:pt x="0" y="0"/>
                   </a:moveTo>
                   <a:lnTo>
-                    <a:pt x="7495890" y="0"/>
+                    <a:pt x="7497353" y="0"/>
                   </a:lnTo>
                   <a:lnTo>
-                    <a:pt x="7495890" y="0"/>
+                    <a:pt x="7497353" y="0"/>
                   </a:lnTo>
                 </a:path>
               </a:pathLst>
@@ -3158,21 +3158,21 @@
           </p:nvSpPr>
           <p:spPr>
             <a:xfrm>
-              <a:off x="1065110" y="4966190"/>
-              <a:ext cx="7495890" cy="0"/>
+              <a:off x="1063647" y="4968320"/>
+              <a:ext cx="7497353" cy="0"/>
             </a:xfrm>
             <a:custGeom>
               <a:avLst/>
               <a:pathLst>
-                <a:path w="7495890" h="0">
+                <a:path w="7497353" h="0">
                   <a:moveTo>
                     <a:pt x="0" y="0"/>
                   </a:moveTo>
                   <a:lnTo>
-                    <a:pt x="7495890" y="0"/>
+                    <a:pt x="7497353" y="0"/>
                   </a:lnTo>
                   <a:lnTo>
-                    <a:pt x="7495890" y="0"/>
+                    <a:pt x="7497353" y="0"/>
                   </a:lnTo>
                 </a:path>
               </a:pathLst>
@@ -3201,21 +3201,21 @@
           </p:nvSpPr>
           <p:spPr>
             <a:xfrm>
-              <a:off x="1065110" y="4088269"/>
-              <a:ext cx="7495890" cy="0"/>
+              <a:off x="1063647" y="4089869"/>
+              <a:ext cx="7497353" cy="0"/>
             </a:xfrm>
             <a:custGeom>
               <a:avLst/>
               <a:pathLst>
-                <a:path w="7495890" h="0">
+                <a:path w="7497353" h="0">
                   <a:moveTo>
                     <a:pt x="0" y="0"/>
                   </a:moveTo>
                   <a:lnTo>
-                    <a:pt x="7495890" y="0"/>
+                    <a:pt x="7497353" y="0"/>
                   </a:lnTo>
                   <a:lnTo>
-                    <a:pt x="7495890" y="0"/>
+                    <a:pt x="7497353" y="0"/>
                   </a:lnTo>
                 </a:path>
               </a:pathLst>
@@ -3244,21 +3244,21 @@
           </p:nvSpPr>
           <p:spPr>
             <a:xfrm>
-              <a:off x="1065110" y="3210348"/>
-              <a:ext cx="7495890" cy="0"/>
+              <a:off x="1063647" y="3211417"/>
+              <a:ext cx="7497353" cy="0"/>
             </a:xfrm>
             <a:custGeom>
               <a:avLst/>
               <a:pathLst>
-                <a:path w="7495890" h="0">
+                <a:path w="7497353" h="0">
                   <a:moveTo>
                     <a:pt x="0" y="0"/>
                   </a:moveTo>
                   <a:lnTo>
-                    <a:pt x="7495890" y="0"/>
+                    <a:pt x="7497353" y="0"/>
                   </a:lnTo>
                   <a:lnTo>
-                    <a:pt x="7495890" y="0"/>
+                    <a:pt x="7497353" y="0"/>
                   </a:lnTo>
                 </a:path>
               </a:pathLst>
@@ -3287,21 +3287,21 @@
           </p:nvSpPr>
           <p:spPr>
             <a:xfrm>
-              <a:off x="1065110" y="2332427"/>
-              <a:ext cx="7495890" cy="0"/>
+              <a:off x="1063647" y="2332966"/>
+              <a:ext cx="7497353" cy="0"/>
             </a:xfrm>
             <a:custGeom>
               <a:avLst/>
               <a:pathLst>
-                <a:path w="7495890" h="0">
+                <a:path w="7497353" h="0">
                   <a:moveTo>
                     <a:pt x="0" y="0"/>
                   </a:moveTo>
                   <a:lnTo>
-                    <a:pt x="7495890" y="0"/>
+                    <a:pt x="7497353" y="0"/>
                   </a:lnTo>
                   <a:lnTo>
-                    <a:pt x="7495890" y="0"/>
+                    <a:pt x="7497353" y="0"/>
                   </a:lnTo>
                 </a:path>
               </a:pathLst>
@@ -3330,21 +3330,21 @@
           </p:nvSpPr>
           <p:spPr>
             <a:xfrm>
-              <a:off x="1065110" y="1454506"/>
-              <a:ext cx="7495890" cy="0"/>
+              <a:off x="1063647" y="1454514"/>
+              <a:ext cx="7497353" cy="0"/>
             </a:xfrm>
             <a:custGeom>
               <a:avLst/>
               <a:pathLst>
-                <a:path w="7495890" h="0">
+                <a:path w="7497353" h="0">
                   <a:moveTo>
                     <a:pt x="0" y="0"/>
                   </a:moveTo>
                   <a:lnTo>
-                    <a:pt x="7495890" y="0"/>
+                    <a:pt x="7497353" y="0"/>
                   </a:lnTo>
                   <a:lnTo>
-                    <a:pt x="7495890" y="0"/>
+                    <a:pt x="7497353" y="0"/>
                   </a:lnTo>
                 </a:path>
               </a:pathLst>
@@ -3373,15 +3373,15 @@
           </p:nvSpPr>
           <p:spPr>
             <a:xfrm>
-              <a:off x="2254371" y="1441338"/>
-              <a:ext cx="0" cy="4538850"/>
+              <a:off x="2253140" y="1441338"/>
+              <a:ext cx="0" cy="4541593"/>
             </a:xfrm>
             <a:custGeom>
               <a:avLst/>
               <a:pathLst>
-                <a:path w="0" h="4538850">
+                <a:path w="0" h="4541593">
                   <a:moveTo>
-                    <a:pt x="0" y="4538850"/>
+                    <a:pt x="0" y="4541593"/>
                   </a:moveTo>
                   <a:lnTo>
                     <a:pt x="0" y="0"/>
@@ -3416,15 +3416,15 @@
           </p:nvSpPr>
           <p:spPr>
             <a:xfrm>
-              <a:off x="3996750" y="1441338"/>
-              <a:ext cx="0" cy="4538850"/>
+              <a:off x="3995860" y="1441338"/>
+              <a:ext cx="0" cy="4541593"/>
             </a:xfrm>
             <a:custGeom>
               <a:avLst/>
               <a:pathLst>
-                <a:path w="0" h="4538850">
+                <a:path w="0" h="4541593">
                   <a:moveTo>
-                    <a:pt x="0" y="4538850"/>
+                    <a:pt x="0" y="4541593"/>
                   </a:moveTo>
                   <a:lnTo>
                     <a:pt x="0" y="0"/>
@@ -3459,15 +3459,15 @@
           </p:nvSpPr>
           <p:spPr>
             <a:xfrm>
-              <a:off x="5739130" y="1441338"/>
-              <a:ext cx="0" cy="4538850"/>
+              <a:off x="5738579" y="1441338"/>
+              <a:ext cx="0" cy="4541593"/>
             </a:xfrm>
             <a:custGeom>
               <a:avLst/>
               <a:pathLst>
-                <a:path w="0" h="4538850">
+                <a:path w="0" h="4541593">
                   <a:moveTo>
-                    <a:pt x="0" y="4538850"/>
+                    <a:pt x="0" y="4541593"/>
                   </a:moveTo>
                   <a:lnTo>
                     <a:pt x="0" y="0"/>
@@ -3502,15 +3502,15 @@
           </p:nvSpPr>
           <p:spPr>
             <a:xfrm>
-              <a:off x="7481509" y="1441338"/>
-              <a:ext cx="0" cy="4538850"/>
+              <a:off x="7481299" y="1441338"/>
+              <a:ext cx="0" cy="4541593"/>
             </a:xfrm>
             <a:custGeom>
               <a:avLst/>
               <a:pathLst>
-                <a:path w="0" h="4538850">
+                <a:path w="0" h="4541593">
                   <a:moveTo>
-                    <a:pt x="0" y="4538850"/>
+                    <a:pt x="0" y="4541593"/>
                   </a:moveTo>
                   <a:lnTo>
                     <a:pt x="0" y="0"/>
@@ -3545,7 +3545,7 @@
           </p:nvSpPr>
           <p:spPr>
             <a:xfrm>
-              <a:off x="3301571" y="3879610"/>
+              <a:off x="3300551" y="3881103"/>
               <a:ext cx="66150" cy="66150"/>
             </a:xfrm>
             <a:prstGeom prst="ellipse">
@@ -3580,7 +3580,7 @@
           </p:nvSpPr>
           <p:spPr>
             <a:xfrm>
-              <a:off x="3745878" y="3879610"/>
+              <a:off x="3744945" y="3881103"/>
               <a:ext cx="66150" cy="66150"/>
             </a:xfrm>
             <a:prstGeom prst="ellipse">
@@ -3615,7 +3615,7 @@
           </p:nvSpPr>
           <p:spPr>
             <a:xfrm>
-              <a:off x="2778857" y="3563558"/>
+              <a:off x="2777735" y="3564861"/>
               <a:ext cx="66150" cy="66150"/>
             </a:xfrm>
             <a:prstGeom prst="ellipse">
@@ -3650,7 +3650,7 @@
           </p:nvSpPr>
           <p:spPr>
             <a:xfrm>
-              <a:off x="4338287" y="3809376"/>
+              <a:off x="4337469" y="3810827"/>
               <a:ext cx="66150" cy="66150"/>
             </a:xfrm>
             <a:prstGeom prst="ellipse">
@@ -3685,7 +3685,7 @@
           </p:nvSpPr>
           <p:spPr>
             <a:xfrm>
-              <a:off x="4730322" y="4283453"/>
+              <a:off x="4729581" y="4285191"/>
               <a:ext cx="66150" cy="66150"/>
             </a:xfrm>
             <a:prstGeom prst="ellipse">
@@ -3720,7 +3720,7 @@
           </p:nvSpPr>
           <p:spPr>
             <a:xfrm>
-              <a:off x="4765170" y="4388804"/>
+              <a:off x="4764436" y="4390605"/>
               <a:ext cx="66150" cy="66150"/>
             </a:xfrm>
             <a:prstGeom prst="ellipse">
@@ -3755,7 +3755,7 @@
           </p:nvSpPr>
           <p:spPr>
             <a:xfrm>
-              <a:off x="4956832" y="5056024"/>
+              <a:off x="4956135" y="5058228"/>
               <a:ext cx="66150" cy="66150"/>
             </a:xfrm>
             <a:prstGeom prst="ellipse">
@@ -3790,7 +3790,7 @@
           </p:nvSpPr>
           <p:spPr>
             <a:xfrm>
-              <a:off x="4294728" y="3282623"/>
+              <a:off x="4293901" y="3283756"/>
               <a:ext cx="66150" cy="66150"/>
             </a:xfrm>
             <a:prstGeom prst="ellipse">
@@ -3825,7 +3825,7 @@
           </p:nvSpPr>
           <p:spPr>
             <a:xfrm>
-              <a:off x="4225032" y="3563558"/>
+              <a:off x="4224193" y="3564861"/>
               <a:ext cx="66150" cy="66150"/>
             </a:xfrm>
             <a:prstGeom prst="ellipse">
@@ -3860,7 +3860,7 @@
           </p:nvSpPr>
           <p:spPr>
             <a:xfrm>
-              <a:off x="4730322" y="4195661"/>
+              <a:off x="4729581" y="4197346"/>
               <a:ext cx="66150" cy="66150"/>
             </a:xfrm>
             <a:prstGeom prst="ellipse">
@@ -3895,7 +3895,7 @@
           </p:nvSpPr>
           <p:spPr>
             <a:xfrm>
-              <a:off x="4730322" y="4441479"/>
+              <a:off x="4729581" y="4443312"/>
               <a:ext cx="66150" cy="66150"/>
             </a:xfrm>
             <a:prstGeom prst="ellipse">
@@ -3930,7 +3930,7 @@
           </p:nvSpPr>
           <p:spPr>
             <a:xfrm>
-              <a:off x="5828021" y="4687297"/>
+              <a:off x="5827494" y="4689279"/>
               <a:ext cx="66150" cy="66150"/>
             </a:xfrm>
             <a:prstGeom prst="ellipse">
@@ -3965,7 +3965,7 @@
           </p:nvSpPr>
           <p:spPr>
             <a:xfrm>
-              <a:off x="5235612" y="4529271"/>
+              <a:off x="5234970" y="4531157"/>
               <a:ext cx="66150" cy="66150"/>
             </a:xfrm>
             <a:prstGeom prst="ellipse">
@@ -4000,7 +4000,7 @@
           </p:nvSpPr>
           <p:spPr>
             <a:xfrm>
-              <a:off x="5322731" y="4897998"/>
+              <a:off x="5322106" y="4900107"/>
               <a:ext cx="66150" cy="66150"/>
             </a:xfrm>
             <a:prstGeom prst="ellipse">
@@ -4035,7 +4035,7 @@
           </p:nvSpPr>
           <p:spPr>
             <a:xfrm>
-              <a:off x="7884029" y="5740802"/>
+              <a:off x="7883903" y="5743420"/>
               <a:ext cx="66150" cy="66150"/>
             </a:xfrm>
             <a:prstGeom prst="ellipse">
@@ -4070,7 +4070,7 @@
           </p:nvSpPr>
           <p:spPr>
             <a:xfrm>
-              <a:off x="8187203" y="5740802"/>
+              <a:off x="8187137" y="5743420"/>
               <a:ext cx="66150" cy="66150"/>
             </a:xfrm>
             <a:prstGeom prst="ellipse">
@@ -4105,7 +4105,7 @@
           </p:nvSpPr>
           <p:spPr>
             <a:xfrm>
-              <a:off x="8049555" y="4985790"/>
+              <a:off x="8049462" y="4987952"/>
               <a:ext cx="66150" cy="66150"/>
             </a:xfrm>
             <a:prstGeom prst="ellipse">
@@ -4140,7 +4140,7 @@
           </p:nvSpPr>
           <p:spPr>
             <a:xfrm>
-              <a:off x="2569772" y="1877950"/>
+              <a:off x="2568609" y="1878234"/>
               <a:ext cx="66150" cy="66150"/>
             </a:xfrm>
             <a:prstGeom prst="ellipse">
@@ -4175,7 +4175,7 @@
           </p:nvSpPr>
           <p:spPr>
             <a:xfrm>
-              <a:off x="1550480" y="2229119"/>
+              <a:off x="1549118" y="2229615"/>
               <a:ext cx="66150" cy="66150"/>
             </a:xfrm>
             <a:prstGeom prst="ellipse">
@@ -4210,7 +4210,7 @@
           </p:nvSpPr>
           <p:spPr>
             <a:xfrm>
-              <a:off x="1933803" y="1614574"/>
+              <a:off x="1932516" y="1614699"/>
               <a:ext cx="66150" cy="66150"/>
             </a:xfrm>
             <a:prstGeom prst="ellipse">
@@ -4245,7 +4245,7 @@
           </p:nvSpPr>
           <p:spPr>
             <a:xfrm>
-              <a:off x="3031502" y="3791818"/>
+              <a:off x="3030430" y="3793258"/>
               <a:ext cx="66150" cy="66150"/>
             </a:xfrm>
             <a:prstGeom prst="ellipse">
@@ -4280,7 +4280,7 @@
           </p:nvSpPr>
           <p:spPr>
             <a:xfrm>
-              <a:off x="4869713" y="4845323"/>
+              <a:off x="4868999" y="4847400"/>
               <a:ext cx="66150" cy="66150"/>
             </a:xfrm>
             <a:prstGeom prst="ellipse">
@@ -4315,7 +4315,7 @@
           </p:nvSpPr>
           <p:spPr>
             <a:xfrm>
-              <a:off x="4721610" y="4897998"/>
+              <a:off x="4720868" y="4900107"/>
               <a:ext cx="66150" cy="66150"/>
             </a:xfrm>
             <a:prstGeom prst="ellipse">
@@ -4350,7 +4350,7 @@
           </p:nvSpPr>
           <p:spPr>
             <a:xfrm>
-              <a:off x="5427274" y="5231608"/>
+              <a:off x="5426669" y="5233918"/>
               <a:ext cx="66150" cy="66150"/>
             </a:xfrm>
             <a:prstGeom prst="ellipse">
@@ -4385,7 +4385,7 @@
           </p:nvSpPr>
           <p:spPr>
             <a:xfrm>
-              <a:off x="5435986" y="4195661"/>
+              <a:off x="5435383" y="4197346"/>
               <a:ext cx="66150" cy="66150"/>
             </a:xfrm>
             <a:prstGeom prst="ellipse">
@@ -4420,7 +4420,7 @@
           </p:nvSpPr>
           <p:spPr>
             <a:xfrm>
-              <a:off x="2108041" y="2773429"/>
+              <a:off x="2106788" y="2774254"/>
               <a:ext cx="66150" cy="66150"/>
             </a:xfrm>
             <a:prstGeom prst="ellipse">
@@ -4455,7 +4455,7 @@
           </p:nvSpPr>
           <p:spPr>
             <a:xfrm>
-              <a:off x="2465229" y="3001689"/>
+              <a:off x="2464046" y="3002652"/>
               <a:ext cx="66150" cy="66150"/>
             </a:xfrm>
             <a:prstGeom prst="ellipse">
@@ -4490,7 +4490,7 @@
           </p:nvSpPr>
           <p:spPr>
             <a:xfrm>
-              <a:off x="1372757" y="2229119"/>
+              <a:off x="1371361" y="2229615"/>
               <a:ext cx="66150" cy="66150"/>
             </a:xfrm>
             <a:prstGeom prst="ellipse">
@@ -4525,7 +4525,7 @@
           </p:nvSpPr>
           <p:spPr>
             <a:xfrm>
-              <a:off x="4259880" y="4792647"/>
+              <a:off x="4259047" y="4794693"/>
               <a:ext cx="66150" cy="66150"/>
             </a:xfrm>
             <a:prstGeom prst="ellipse">
@@ -4560,7 +4560,7 @@
           </p:nvSpPr>
           <p:spPr>
             <a:xfrm>
-              <a:off x="3562928" y="4107869"/>
+              <a:off x="3561959" y="4109501"/>
               <a:ext cx="66150" cy="66150"/>
             </a:xfrm>
             <a:prstGeom prst="ellipse">
@@ -4595,7 +4595,7 @@
           </p:nvSpPr>
           <p:spPr>
             <a:xfrm>
-              <a:off x="4956832" y="4933115"/>
+              <a:off x="4956135" y="4935245"/>
               <a:ext cx="66150" cy="66150"/>
             </a:xfrm>
             <a:prstGeom prst="ellipse">
@@ -4630,7 +4630,7 @@
           </p:nvSpPr>
           <p:spPr>
             <a:xfrm>
-              <a:off x="3580352" y="3809376"/>
+              <a:off x="3579386" y="3810827"/>
               <a:ext cx="66150" cy="66150"/>
             </a:xfrm>
             <a:prstGeom prst="ellipse">
@@ -4665,7 +4665,7 @@
           </p:nvSpPr>
           <p:spPr>
             <a:xfrm>
-              <a:off x="872818" y="5804563"/>
+              <a:off x="871355" y="5807224"/>
               <a:ext cx="129661" cy="79095"/>
             </a:xfrm>
             <a:prstGeom prst="rect">
@@ -4678,9 +4678,6 @@
             <a:lstStyle/>
             <a:p>
               <a:pPr algn="l" marL="0" marR="0" indent="0">
-                <a:lnSpc>
-                  <a:spcPts val="880"/>
-                </a:lnSpc>
                 <a:spcBef>
                   <a:spcPts val="0"/>
                 </a:spcBef>
@@ -4689,7 +4686,7 @@
                 </a:spcAft>
               </a:pPr>
               <a:r>
-                <a:rPr sz="880">
+                <a:rPr sz="880" i="0" b="0">
                   <a:solidFill>
                     <a:srgbClr val="4D4D4D">
                       <a:alpha val="100000"/>
@@ -4711,7 +4708,7 @@
           </p:nvSpPr>
           <p:spPr>
             <a:xfrm>
-              <a:off x="872818" y="4926642"/>
+              <a:off x="871355" y="4928772"/>
               <a:ext cx="129661" cy="79095"/>
             </a:xfrm>
             <a:prstGeom prst="rect">
@@ -4724,9 +4721,6 @@
             <a:lstStyle/>
             <a:p>
               <a:pPr algn="l" marL="0" marR="0" indent="0">
-                <a:lnSpc>
-                  <a:spcPts val="880"/>
-                </a:lnSpc>
                 <a:spcBef>
                   <a:spcPts val="0"/>
                 </a:spcBef>
@@ -4735,7 +4729,7 @@
                 </a:spcAft>
               </a:pPr>
               <a:r>
-                <a:rPr sz="880">
+                <a:rPr sz="880" i="0" b="0">
                   <a:solidFill>
                     <a:srgbClr val="4D4D4D">
                       <a:alpha val="100000"/>
@@ -4757,7 +4751,7 @@
           </p:nvSpPr>
           <p:spPr>
             <a:xfrm>
-              <a:off x="872818" y="4048721"/>
+              <a:off x="871355" y="4050321"/>
               <a:ext cx="129661" cy="79095"/>
             </a:xfrm>
             <a:prstGeom prst="rect">
@@ -4770,9 +4764,6 @@
             <a:lstStyle/>
             <a:p>
               <a:pPr algn="l" marL="0" marR="0" indent="0">
-                <a:lnSpc>
-                  <a:spcPts val="880"/>
-                </a:lnSpc>
                 <a:spcBef>
                   <a:spcPts val="0"/>
                 </a:spcBef>
@@ -4781,7 +4772,7 @@
                 </a:spcAft>
               </a:pPr>
               <a:r>
-                <a:rPr sz="880">
+                <a:rPr sz="880" i="0" b="0">
                   <a:solidFill>
                     <a:srgbClr val="4D4D4D">
                       <a:alpha val="100000"/>
@@ -4803,7 +4794,7 @@
           </p:nvSpPr>
           <p:spPr>
             <a:xfrm>
-              <a:off x="872818" y="3170800"/>
+              <a:off x="871355" y="3171869"/>
               <a:ext cx="129661" cy="79095"/>
             </a:xfrm>
             <a:prstGeom prst="rect">
@@ -4816,9 +4807,6 @@
             <a:lstStyle/>
             <a:p>
               <a:pPr algn="l" marL="0" marR="0" indent="0">
-                <a:lnSpc>
-                  <a:spcPts val="880"/>
-                </a:lnSpc>
                 <a:spcBef>
                   <a:spcPts val="0"/>
                 </a:spcBef>
@@ -4827,7 +4815,7 @@
                 </a:spcAft>
               </a:pPr>
               <a:r>
-                <a:rPr sz="880">
+                <a:rPr sz="880" i="0" b="0">
                   <a:solidFill>
                     <a:srgbClr val="4D4D4D">
                       <a:alpha val="100000"/>
@@ -4849,7 +4837,7 @@
           </p:nvSpPr>
           <p:spPr>
             <a:xfrm>
-              <a:off x="872818" y="2292879"/>
+              <a:off x="871355" y="2293418"/>
               <a:ext cx="129661" cy="79095"/>
             </a:xfrm>
             <a:prstGeom prst="rect">
@@ -4862,9 +4850,6 @@
             <a:lstStyle/>
             <a:p>
               <a:pPr algn="l" marL="0" marR="0" indent="0">
-                <a:lnSpc>
-                  <a:spcPts val="880"/>
-                </a:lnSpc>
                 <a:spcBef>
                   <a:spcPts val="0"/>
                 </a:spcBef>
@@ -4873,7 +4858,7 @@
                 </a:spcAft>
               </a:pPr>
               <a:r>
-                <a:rPr sz="880">
+                <a:rPr sz="880" i="0" b="0">
                   <a:solidFill>
                     <a:srgbClr val="4D4D4D">
                       <a:alpha val="100000"/>
@@ -4895,7 +4880,7 @@
           </p:nvSpPr>
           <p:spPr>
             <a:xfrm>
-              <a:off x="872818" y="1414959"/>
+              <a:off x="871355" y="1414967"/>
               <a:ext cx="129661" cy="79095"/>
             </a:xfrm>
             <a:prstGeom prst="rect">
@@ -4908,9 +4893,6 @@
             <a:lstStyle/>
             <a:p>
               <a:pPr algn="l" marL="0" marR="0" indent="0">
-                <a:lnSpc>
-                  <a:spcPts val="880"/>
-                </a:lnSpc>
                 <a:spcBef>
                   <a:spcPts val="0"/>
                 </a:spcBef>
@@ -4919,7 +4901,7 @@
                 </a:spcAft>
               </a:pPr>
               <a:r>
-                <a:rPr sz="880">
+                <a:rPr sz="880" i="0" b="0">
                   <a:solidFill>
                     <a:srgbClr val="4D4D4D">
                       <a:alpha val="100000"/>
@@ -4941,7 +4923,7 @@
           </p:nvSpPr>
           <p:spPr>
             <a:xfrm>
-              <a:off x="1030315" y="5844110"/>
+              <a:off x="1028852" y="5846771"/>
               <a:ext cx="34794" cy="0"/>
             </a:xfrm>
             <a:custGeom>
@@ -4981,7 +4963,7 @@
           </p:nvSpPr>
           <p:spPr>
             <a:xfrm>
-              <a:off x="1030315" y="4966190"/>
+              <a:off x="1028852" y="4968320"/>
               <a:ext cx="34794" cy="0"/>
             </a:xfrm>
             <a:custGeom>
@@ -5021,7 +5003,7 @@
           </p:nvSpPr>
           <p:spPr>
             <a:xfrm>
-              <a:off x="1030315" y="4088269"/>
+              <a:off x="1028852" y="4089869"/>
               <a:ext cx="34794" cy="0"/>
             </a:xfrm>
             <a:custGeom>
@@ -5061,7 +5043,7 @@
           </p:nvSpPr>
           <p:spPr>
             <a:xfrm>
-              <a:off x="1030315" y="3210348"/>
+              <a:off x="1028852" y="3211417"/>
               <a:ext cx="34794" cy="0"/>
             </a:xfrm>
             <a:custGeom>
@@ -5101,7 +5083,7 @@
           </p:nvSpPr>
           <p:spPr>
             <a:xfrm>
-              <a:off x="1030315" y="2332427"/>
+              <a:off x="1028852" y="2332966"/>
               <a:ext cx="34794" cy="0"/>
             </a:xfrm>
             <a:custGeom>
@@ -5141,7 +5123,7 @@
           </p:nvSpPr>
           <p:spPr>
             <a:xfrm>
-              <a:off x="1030315" y="1454506"/>
+              <a:off x="1028852" y="1454514"/>
               <a:ext cx="34794" cy="0"/>
             </a:xfrm>
             <a:custGeom>
@@ -5181,7 +5163,7 @@
           </p:nvSpPr>
           <p:spPr>
             <a:xfrm>
-              <a:off x="2254371" y="5980188"/>
+              <a:off x="2253140" y="5982931"/>
               <a:ext cx="0" cy="34794"/>
             </a:xfrm>
             <a:custGeom>
@@ -5221,7 +5203,7 @@
           </p:nvSpPr>
           <p:spPr>
             <a:xfrm>
-              <a:off x="3996750" y="5980188"/>
+              <a:off x="3995860" y="5982931"/>
               <a:ext cx="0" cy="34794"/>
             </a:xfrm>
             <a:custGeom>
@@ -5261,7 +5243,7 @@
           </p:nvSpPr>
           <p:spPr>
             <a:xfrm>
-              <a:off x="5739130" y="5980188"/>
+              <a:off x="5738579" y="5982931"/>
               <a:ext cx="0" cy="34794"/>
             </a:xfrm>
             <a:custGeom>
@@ -5301,7 +5283,7 @@
           </p:nvSpPr>
           <p:spPr>
             <a:xfrm>
-              <a:off x="7481509" y="5980188"/>
+              <a:off x="7481299" y="5982931"/>
               <a:ext cx="0" cy="34794"/>
             </a:xfrm>
             <a:custGeom>
@@ -5341,7 +5323,7 @@
           </p:nvSpPr>
           <p:spPr>
             <a:xfrm>
-              <a:off x="2221956" y="6042818"/>
+              <a:off x="2220725" y="6045561"/>
               <a:ext cx="64830" cy="79095"/>
             </a:xfrm>
             <a:prstGeom prst="rect">
@@ -5354,9 +5336,6 @@
             <a:lstStyle/>
             <a:p>
               <a:pPr algn="l" marL="0" marR="0" indent="0">
-                <a:lnSpc>
-                  <a:spcPts val="880"/>
-                </a:lnSpc>
                 <a:spcBef>
                   <a:spcPts val="0"/>
                 </a:spcBef>
@@ -5365,7 +5344,7 @@
                 </a:spcAft>
               </a:pPr>
               <a:r>
-                <a:rPr sz="880">
+                <a:rPr sz="880" i="0" b="0">
                   <a:solidFill>
                     <a:srgbClr val="4D4D4D">
                       <a:alpha val="100000"/>
@@ -5387,7 +5366,7 @@
           </p:nvSpPr>
           <p:spPr>
             <a:xfrm>
-              <a:off x="3964335" y="6042818"/>
+              <a:off x="3963444" y="6045561"/>
               <a:ext cx="64830" cy="79095"/>
             </a:xfrm>
             <a:prstGeom prst="rect">
@@ -5400,9 +5379,6 @@
             <a:lstStyle/>
             <a:p>
               <a:pPr algn="l" marL="0" marR="0" indent="0">
-                <a:lnSpc>
-                  <a:spcPts val="880"/>
-                </a:lnSpc>
                 <a:spcBef>
                   <a:spcPts val="0"/>
                 </a:spcBef>
@@ -5411,7 +5387,7 @@
                 </a:spcAft>
               </a:pPr>
               <a:r>
-                <a:rPr sz="880">
+                <a:rPr sz="880" i="0" b="0">
                   <a:solidFill>
                     <a:srgbClr val="4D4D4D">
                       <a:alpha val="100000"/>
@@ -5433,7 +5409,7 @@
           </p:nvSpPr>
           <p:spPr>
             <a:xfrm>
-              <a:off x="5706714" y="6042818"/>
+              <a:off x="5706164" y="6045561"/>
               <a:ext cx="64830" cy="79095"/>
             </a:xfrm>
             <a:prstGeom prst="rect">
@@ -5446,9 +5422,6 @@
             <a:lstStyle/>
             <a:p>
               <a:pPr algn="l" marL="0" marR="0" indent="0">
-                <a:lnSpc>
-                  <a:spcPts val="880"/>
-                </a:lnSpc>
                 <a:spcBef>
                   <a:spcPts val="0"/>
                 </a:spcBef>
@@ -5457,7 +5430,7 @@
                 </a:spcAft>
               </a:pPr>
               <a:r>
-                <a:rPr sz="880">
+                <a:rPr sz="880" i="0" b="0">
                   <a:solidFill>
                     <a:srgbClr val="4D4D4D">
                       <a:alpha val="100000"/>
@@ -5479,7 +5452,7 @@
           </p:nvSpPr>
           <p:spPr>
             <a:xfrm>
-              <a:off x="7449094" y="6042818"/>
+              <a:off x="7448883" y="6045561"/>
               <a:ext cx="64830" cy="79095"/>
             </a:xfrm>
             <a:prstGeom prst="rect">
@@ -5492,9 +5465,6 @@
             <a:lstStyle/>
             <a:p>
               <a:pPr algn="l" marL="0" marR="0" indent="0">
-                <a:lnSpc>
-                  <a:spcPts val="880"/>
-                </a:lnSpc>
                 <a:spcBef>
                   <a:spcPts val="0"/>
                 </a:spcBef>
@@ -5503,7 +5473,7 @@
                 </a:spcAft>
               </a:pPr>
               <a:r>
-                <a:rPr sz="880">
+                <a:rPr sz="880" i="0" b="0">
                   <a:solidFill>
                     <a:srgbClr val="4D4D4D">
                       <a:alpha val="100000"/>
@@ -5525,7 +5495,7 @@
           </p:nvSpPr>
           <p:spPr>
             <a:xfrm>
-              <a:off x="4738806" y="6181489"/>
+              <a:off x="4738074" y="6182952"/>
               <a:ext cx="148498" cy="98938"/>
             </a:xfrm>
             <a:prstGeom prst="rect">
@@ -5538,9 +5508,6 @@
             <a:lstStyle/>
             <a:p>
               <a:pPr algn="l" marL="0" marR="0" indent="0">
-                <a:lnSpc>
-                  <a:spcPts val="1100"/>
-                </a:lnSpc>
                 <a:spcBef>
                   <a:spcPts val="0"/>
                 </a:spcBef>
@@ -5549,7 +5516,7 @@
                 </a:spcAft>
               </a:pPr>
               <a:r>
-                <a:rPr sz="1100">
+                <a:rPr sz="1100" i="0" b="0">
                   <a:solidFill>
                     <a:srgbClr val="000000">
                       <a:alpha val="100000"/>
@@ -5571,7 +5538,7 @@
           </p:nvSpPr>
           <p:spPr>
             <a:xfrm rot="-5400000">
-              <a:off x="607457" y="3661294"/>
+              <a:off x="607457" y="3662665"/>
               <a:ext cx="300380" cy="98938"/>
             </a:xfrm>
             <a:prstGeom prst="rect">
@@ -5584,9 +5551,6 @@
             <a:lstStyle/>
             <a:p>
               <a:pPr algn="l" marL="0" marR="0" indent="0">
-                <a:lnSpc>
-                  <a:spcPts val="1100"/>
-                </a:lnSpc>
                 <a:spcBef>
                   <a:spcPts val="0"/>
                 </a:spcBef>
@@ -5595,7 +5559,7 @@
                 </a:spcAft>
               </a:pPr>
               <a:r>
-                <a:rPr sz="1100">
+                <a:rPr sz="1100" i="0" b="0">
                   <a:solidFill>
                     <a:srgbClr val="000000">
                       <a:alpha val="100000"/>
@@ -7096,9 +7060,6 @@
             <a:lstStyle/>
             <a:p>
               <a:pPr algn="l" marL="0" marR="0" indent="0">
-                <a:lnSpc>
-                  <a:spcPts val="1800"/>
-                </a:lnSpc>
                 <a:spcBef>
                   <a:spcPts val="0"/>
                 </a:spcBef>
@@ -7107,7 +7068,7 @@
                 </a:spcAft>
               </a:pPr>
               <a:r>
-                <a:rPr sz="1800">
+                <a:rPr sz="1800" i="0" b="0">
                   <a:solidFill>
                     <a:srgbClr val="000000">
                       <a:alpha val="100000"/>
@@ -7142,9 +7103,6 @@
             <a:lstStyle/>
             <a:p>
               <a:pPr algn="l" marL="0" marR="0" indent="0">
-                <a:lnSpc>
-                  <a:spcPts val="1800"/>
-                </a:lnSpc>
                 <a:spcBef>
                   <a:spcPts val="0"/>
                 </a:spcBef>
@@ -7153,7 +7111,7 @@
                 </a:spcAft>
               </a:pPr>
               <a:r>
-                <a:rPr sz="1800">
+                <a:rPr sz="1800" i="0" b="0">
                   <a:solidFill>
                     <a:srgbClr val="000000">
                       <a:alpha val="100000"/>
@@ -7188,9 +7146,6 @@
             <a:lstStyle/>
             <a:p>
               <a:pPr algn="l" marL="0" marR="0" indent="0">
-                <a:lnSpc>
-                  <a:spcPts val="1800"/>
-                </a:lnSpc>
                 <a:spcBef>
                   <a:spcPts val="0"/>
                 </a:spcBef>
@@ -7199,7 +7154,7 @@
                 </a:spcAft>
               </a:pPr>
               <a:r>
-                <a:rPr sz="1800">
+                <a:rPr sz="1800" i="0" b="0">
                   <a:solidFill>
                     <a:srgbClr val="000000">
                       <a:alpha val="100000"/>
@@ -7234,9 +7189,6 @@
             <a:lstStyle/>
             <a:p>
               <a:pPr algn="l" marL="0" marR="0" indent="0">
-                <a:lnSpc>
-                  <a:spcPts val="1800"/>
-                </a:lnSpc>
                 <a:spcBef>
                   <a:spcPts val="0"/>
                 </a:spcBef>
@@ -7245,7 +7197,7 @@
                 </a:spcAft>
               </a:pPr>
               <a:r>
-                <a:rPr sz="1800">
+                <a:rPr sz="1800" i="0" b="0">
                   <a:solidFill>
                     <a:srgbClr val="000000">
                       <a:alpha val="100000"/>
@@ -7560,9 +7512,6 @@
             <a:lstStyle/>
             <a:p>
               <a:pPr algn="l" marL="0" marR="0" indent="0">
-                <a:lnSpc>
-                  <a:spcPts val="1800"/>
-                </a:lnSpc>
                 <a:spcBef>
                   <a:spcPts val="0"/>
                 </a:spcBef>
@@ -7571,7 +7520,7 @@
                 </a:spcAft>
               </a:pPr>
               <a:r>
-                <a:rPr sz="1800">
+                <a:rPr sz="1800" i="0" b="0">
                   <a:solidFill>
                     <a:srgbClr val="000000">
                       <a:alpha val="100000"/>
@@ -7606,9 +7555,6 @@
             <a:lstStyle/>
             <a:p>
               <a:pPr algn="l" marL="0" marR="0" indent="0">
-                <a:lnSpc>
-                  <a:spcPts val="1800"/>
-                </a:lnSpc>
                 <a:spcBef>
                   <a:spcPts val="0"/>
                 </a:spcBef>
@@ -7617,7 +7563,7 @@
                 </a:spcAft>
               </a:pPr>
               <a:r>
-                <a:rPr sz="1800">
+                <a:rPr sz="1800" i="0" b="0">
                   <a:solidFill>
                     <a:srgbClr val="000000">
                       <a:alpha val="100000"/>
@@ -7652,9 +7598,6 @@
             <a:lstStyle/>
             <a:p>
               <a:pPr algn="l" marL="0" marR="0" indent="0">
-                <a:lnSpc>
-                  <a:spcPts val="1800"/>
-                </a:lnSpc>
                 <a:spcBef>
                   <a:spcPts val="0"/>
                 </a:spcBef>
@@ -7663,7 +7606,7 @@
                 </a:spcAft>
               </a:pPr>
               <a:r>
-                <a:rPr sz="1800">
+                <a:rPr sz="1800" i="0" b="0">
                   <a:solidFill>
                     <a:srgbClr val="000000">
                       <a:alpha val="100000"/>
@@ -7698,9 +7641,6 @@
             <a:lstStyle/>
             <a:p>
               <a:pPr algn="l" marL="0" marR="0" indent="0">
-                <a:lnSpc>
-                  <a:spcPts val="1800"/>
-                </a:lnSpc>
                 <a:spcBef>
                   <a:spcPts val="0"/>
                 </a:spcBef>
@@ -7709,7 +7649,7 @@
                 </a:spcAft>
               </a:pPr>
               <a:r>
-                <a:rPr sz="1800">
+                <a:rPr sz="1800" i="0" b="0">
                   <a:solidFill>
                     <a:srgbClr val="000000">
                       <a:alpha val="100000"/>
@@ -7744,9 +7684,6 @@
             <a:lstStyle/>
             <a:p>
               <a:pPr algn="l" marL="0" marR="0" indent="0">
-                <a:lnSpc>
-                  <a:spcPts val="1800"/>
-                </a:lnSpc>
                 <a:spcBef>
                   <a:spcPts val="0"/>
                 </a:spcBef>
@@ -7755,7 +7692,7 @@
                 </a:spcAft>
               </a:pPr>
               <a:r>
-                <a:rPr sz="1800">
+                <a:rPr sz="1800" i="0" b="0">
                   <a:solidFill>
                     <a:srgbClr val="000000">
                       <a:alpha val="100000"/>
@@ -7790,9 +7727,6 @@
             <a:lstStyle/>
             <a:p>
               <a:pPr algn="l" marL="0" marR="0" indent="0">
-                <a:lnSpc>
-                  <a:spcPts val="1800"/>
-                </a:lnSpc>
                 <a:spcBef>
                   <a:spcPts val="0"/>
                 </a:spcBef>
@@ -7801,7 +7735,7 @@
                 </a:spcAft>
               </a:pPr>
               <a:r>
-                <a:rPr sz="1800">
+                <a:rPr sz="1800" i="0" b="0">
                   <a:solidFill>
                     <a:srgbClr val="000000">
                       <a:alpha val="100000"/>
@@ -7836,9 +7770,6 @@
             <a:lstStyle/>
             <a:p>
               <a:pPr algn="l" marL="0" marR="0" indent="0">
-                <a:lnSpc>
-                  <a:spcPts val="1800"/>
-                </a:lnSpc>
                 <a:spcBef>
                   <a:spcPts val="0"/>
                 </a:spcBef>
@@ -7847,7 +7778,7 @@
                 </a:spcAft>
               </a:pPr>
               <a:r>
-                <a:rPr sz="1800">
+                <a:rPr sz="1800" i="0" b="0">
                   <a:solidFill>
                     <a:srgbClr val="000000">
                       <a:alpha val="100000"/>

--- a/tests/testthat/multi_slide_fullslide_43.pptx
+++ b/tests/testthat/multi_slide_fullslide_43.pptx
@@ -5623,8 +5623,10 @@
           <a:p>
             <a:r>
               <a:rPr/>
-              <a:t>Notes: notes. 
-Source: source</a:t>
+              <a:t>Notes:
+notes.
+Source:
+source</a:t>
             </a:r>
           </a:p>
         </p:txBody>
@@ -7842,8 +7844,10 @@
           <a:p>
             <a:r>
               <a:rPr/>
-              <a:t>Notes: notes. 
-Source: source</a:t>
+              <a:t>Notes:
+notes.
+Source:
+source</a:t>
             </a:r>
           </a:p>
         </p:txBody>
